--- a/protected-resources/ambassador/week-11/Future-Ready-Week-11-Slides.pptx
+++ b/protected-resources/ambassador/week-11/Future-Ready-Week-11-Slides.pptx
@@ -11,12 +11,6 @@
     <p:sldId id="259" r:id="rId10"/>
     <p:sldId id="260" r:id="rId11"/>
     <p:sldId id="261" r:id="rId12"/>
-    <p:sldId id="262" r:id="rId13"/>
-    <p:sldId id="263" r:id="rId14"/>
-    <p:sldId id="264" r:id="rId15"/>
-    <p:sldId id="265" r:id="rId16"/>
-    <p:sldId id="266" r:id="rId17"/>
-    <p:sldId id="267" r:id="rId18"/>
   </p:sldIdLst>
   <p:sldSz cx="12191695" cy="6858000" type="screen4x3"/>
   <p:notesSz cx="6858000" cy="9144000"/>
@@ -3095,7 +3089,7 @@
     <p:bg>
       <p:bgPr>
         <a:solidFill>
-          <a:srgbClr val="062B3F"/>
+          <a:srgbClr val="F5F7FA"/>
         </a:solidFill>
         <a:effectLst/>
       </p:bgPr>
@@ -3109,20 +3103,20 @@
       <p:grpSpPr/>
       <p:sp>
         <p:nvSpPr>
-          <p:cNvPr id="2" name="Oval 1"/>
+          <p:cNvPr id="2" name="Rectangle 1"/>
           <p:cNvSpPr/>
           <p:nvPr/>
         </p:nvSpPr>
         <p:spPr>
           <a:xfrm>
-            <a:off x="685800" y="731520"/>
-            <a:ext cx="1051560" cy="1051560"/>
-          </a:xfrm>
-          <a:prstGeom prst="ellipse">
+            <a:off x="0" y="0"/>
+            <a:ext cx="12191695" cy="822960"/>
+          </a:xfrm>
+          <a:prstGeom prst="rect">
             <a:avLst/>
           </a:prstGeom>
           <a:solidFill>
-            <a:srgbClr val="F4C542"/>
+            <a:srgbClr val="0D1B3D"/>
           </a:solidFill>
           <a:ln>
             <a:noFill/>
@@ -3158,8 +3152,8 @@
         </p:nvSpPr>
         <p:spPr>
           <a:xfrm>
-            <a:off x="960120" y="1828800"/>
-            <a:ext cx="10241280" cy="1828800"/>
+            <a:off x="411480" y="146304"/>
+            <a:ext cx="11155680" cy="502920"/>
           </a:xfrm>
           <a:prstGeom prst="rect">
             <a:avLst/>
@@ -3172,39 +3166,13 @@
           </a:bodyPr>
           <a:lstStyle/>
           <a:p>
-            <a:pPr>
-              <a:defRPr sz="2400" b="1">
-                <a:solidFill>
-                  <a:srgbClr val="00A6A6"/>
-                </a:solidFill>
-              </a:defRPr>
-            </a:pPr>
-            <a:r>
-              <a:t>WEEK 11</a:t>
-            </a:r>
-          </a:p>
-          <a:p>
-            <a:pPr>
-              <a:defRPr sz="3800" b="1">
-                <a:solidFill>
-                  <a:srgbClr val="FFFFFF"/>
-                </a:solidFill>
-              </a:defRPr>
-            </a:pPr>
-            <a:r>
-              <a:t>Champion Tire &amp; Wheel Tour + Michelle Boudin Prep</a:t>
-            </a:r>
-          </a:p>
-          <a:p>
-            <a:pPr>
-              <a:defRPr sz="2000">
-                <a:solidFill>
-                  <a:srgbClr val="F4C542"/>
-                </a:solidFill>
-              </a:defRPr>
-            </a:pPr>
-            <a:r>
-              <a:t>October 29, 2026 · EXPERIENCE™</a:t>
+            <a:r>
+              <a:rPr sz="1200" b="1">
+                <a:solidFill>
+                  <a:srgbClr val="F2B705"/>
+                </a:solidFill>
+              </a:rPr>
+              <a:t>BUILD6™ · WEEK 11</a:t>
             </a:r>
           </a:p>
         </p:txBody>
@@ -3217,8 +3185,8 @@
         </p:nvSpPr>
         <p:spPr>
           <a:xfrm>
-            <a:off x="960120" y="5212080"/>
-            <a:ext cx="10058400" cy="640080"/>
+            <a:off x="502920" y="1143000"/>
+            <a:ext cx="11064240" cy="1097280"/>
           </a:xfrm>
           <a:prstGeom prst="rect">
             <a:avLst/>
@@ -3231,35 +3199,126 @@
           </a:bodyPr>
           <a:lstStyle/>
           <a:p>
-            <a:pPr>
-              <a:defRPr sz="1800" b="1">
-                <a:solidFill>
-                  <a:srgbClr val="FFFFFF"/>
-                </a:solidFill>
-              </a:defRPr>
-            </a:pPr>
-            <a:r>
-              <a:t>BUILD6™ · BUILD WHAT’S NEXT.</a:t>
-            </a:r>
-          </a:p>
-        </p:txBody>
-      </p:sp>
-      <p:sp>
-        <p:nvSpPr>
-          <p:cNvPr id="5" name="Rectangle 4"/>
+            <a:r>
+              <a:rPr sz="3000" b="1">
+                <a:solidFill>
+                  <a:srgbClr val="0D1B3D"/>
+                </a:solidFill>
+              </a:rPr>
+              <a:t>How a Business Actually Works</a:t>
+            </a:r>
+          </a:p>
+        </p:txBody>
+      </p:sp>
+      <p:sp>
+        <p:nvSpPr>
+          <p:cNvPr id="5" name="TextBox 4"/>
+          <p:cNvSpPr txBox="1"/>
+          <p:nvPr/>
+        </p:nvSpPr>
+        <p:spPr>
+          <a:xfrm>
+            <a:off x="530352" y="2148840"/>
+            <a:ext cx="10789920" cy="731520"/>
+          </a:xfrm>
+          <a:prstGeom prst="rect">
+            <a:avLst/>
+          </a:prstGeom>
+          <a:noFill/>
+        </p:spPr>
+        <p:txBody>
+          <a:bodyPr wrap="none">
+            <a:spAutoFit/>
+          </a:bodyPr>
+          <a:lstStyle/>
+          <a:p>
+            <a:r>
+              <a:rPr sz="1600">
+                <a:solidFill>
+                  <a:srgbClr val="3C4655"/>
+                </a:solidFill>
+              </a:rPr>
+              <a:t>Champion Tire &amp; Wheel - Operations. Customers. Quality. Careers.</a:t>
+            </a:r>
+          </a:p>
+        </p:txBody>
+      </p:sp>
+      <p:sp>
+        <p:nvSpPr>
+          <p:cNvPr id="6" name="TextBox 5"/>
+          <p:cNvSpPr txBox="1"/>
+          <p:nvPr/>
+        </p:nvSpPr>
+        <p:spPr>
+          <a:xfrm>
+            <a:off x="640080" y="3749039"/>
+            <a:ext cx="10972800" cy="1097280"/>
+          </a:xfrm>
+          <a:prstGeom prst="rect">
+            <a:avLst/>
+          </a:prstGeom>
+          <a:noFill/>
+        </p:spPr>
+        <p:txBody>
+          <a:bodyPr wrap="none">
+            <a:spAutoFit/>
+          </a:bodyPr>
+          <a:lstStyle/>
+          <a:p>
+            <a:pPr algn="ctr"/>
+            <a:r>
+              <a:rPr sz="2200" b="1">
+                <a:solidFill>
+                  <a:srgbClr val="4B2265"/>
+                </a:solidFill>
+              </a:rPr>
+              <a:t>How do people, process, technology, quality, safety, and customer needs connect inside a real business?</a:t>
+            </a:r>
+          </a:p>
+        </p:txBody>
+      </p:sp>
+    </p:spTree>
+  </p:cSld>
+  <p:clrMapOvr>
+    <a:masterClrMapping/>
+  </p:clrMapOvr>
+</p:sld>
+</file>
+
+<file path=ppt/slides/slide2.xml><?xml version="1.0" encoding="utf-8"?>
+<p:sld xmlns:a="http://schemas.openxmlformats.org/drawingml/2006/main" xmlns:p="http://schemas.openxmlformats.org/presentationml/2006/main" xmlns:r="http://schemas.openxmlformats.org/officeDocument/2006/relationships">
+  <p:cSld>
+    <p:bg>
+      <p:bgPr>
+        <a:solidFill>
+          <a:srgbClr val="F5F7FA"/>
+        </a:solidFill>
+        <a:effectLst/>
+      </p:bgPr>
+    </p:bg>
+    <p:spTree>
+      <p:nvGrpSpPr>
+        <p:cNvPr id="1" name=""/>
+        <p:cNvGrpSpPr/>
+        <p:nvPr/>
+      </p:nvGrpSpPr>
+      <p:grpSpPr/>
+      <p:sp>
+        <p:nvSpPr>
+          <p:cNvPr id="2" name="Rectangle 1"/>
           <p:cNvSpPr/>
           <p:nvPr/>
         </p:nvSpPr>
         <p:spPr>
           <a:xfrm>
-            <a:off x="0" y="6446520"/>
-            <a:ext cx="12191695" cy="411480"/>
+            <a:off x="0" y="0"/>
+            <a:ext cx="12191695" cy="822960"/>
           </a:xfrm>
           <a:prstGeom prst="rect">
             <a:avLst/>
           </a:prstGeom>
           <a:solidFill>
-            <a:srgbClr val="062B3F"/>
+            <a:srgbClr val="0D1B3D"/>
           </a:solidFill>
           <a:ln>
             <a:noFill/>
@@ -3289,14 +3348,14 @@
       </p:sp>
       <p:sp>
         <p:nvSpPr>
-          <p:cNvPr id="6" name="TextBox 5"/>
+          <p:cNvPr id="3" name="TextBox 2"/>
           <p:cNvSpPr txBox="1"/>
           <p:nvPr/>
         </p:nvSpPr>
         <p:spPr>
           <a:xfrm>
-            <a:off x="457200" y="6510528"/>
-            <a:ext cx="11247120" cy="182880"/>
+            <a:off x="411480" y="146304"/>
+            <a:ext cx="11155680" cy="502920"/>
           </a:xfrm>
           <a:prstGeom prst="rect">
             <a:avLst/>
@@ -3309,15 +3368,204 @@
           </a:bodyPr>
           <a:lstStyle/>
           <a:p>
-            <a:pPr algn="ctr">
-              <a:defRPr sz="900">
-                <a:solidFill>
-                  <a:srgbClr val="FFFFFF"/>
+            <a:r>
+              <a:rPr sz="1200" b="1">
+                <a:solidFill>
+                  <a:srgbClr val="F2B705"/>
+                </a:solidFill>
+              </a:rPr>
+              <a:t>WEEK 11</a:t>
+            </a:r>
+          </a:p>
+        </p:txBody>
+      </p:sp>
+      <p:sp>
+        <p:nvSpPr>
+          <p:cNvPr id="4" name="TextBox 3"/>
+          <p:cNvSpPr txBox="1"/>
+          <p:nvPr/>
+        </p:nvSpPr>
+        <p:spPr>
+          <a:xfrm>
+            <a:off x="502920" y="1143000"/>
+            <a:ext cx="11064240" cy="1097280"/>
+          </a:xfrm>
+          <a:prstGeom prst="rect">
+            <a:avLst/>
+          </a:prstGeom>
+          <a:noFill/>
+        </p:spPr>
+        <p:txBody>
+          <a:bodyPr wrap="none">
+            <a:spAutoFit/>
+          </a:bodyPr>
+          <a:lstStyle/>
+          <a:p>
+            <a:r>
+              <a:rPr sz="3000" b="1">
+                <a:solidFill>
+                  <a:srgbClr val="0D1B3D"/>
+                </a:solidFill>
+              </a:rPr>
+              <a:t>This Week Builds</a:t>
+            </a:r>
+          </a:p>
+        </p:txBody>
+      </p:sp>
+      <p:sp>
+        <p:nvSpPr>
+          <p:cNvPr id="5" name="TextBox 4"/>
+          <p:cNvSpPr txBox="1"/>
+          <p:nvPr/>
+        </p:nvSpPr>
+        <p:spPr>
+          <a:xfrm>
+            <a:off x="731520" y="2011680"/>
+            <a:ext cx="10789920" cy="4297680"/>
+          </a:xfrm>
+          <a:prstGeom prst="rect">
+            <a:avLst/>
+          </a:prstGeom>
+          <a:noFill/>
+        </p:spPr>
+        <p:txBody>
+          <a:bodyPr wrap="square">
+            <a:spAutoFit/>
+          </a:bodyPr>
+          <a:lstStyle/>
+          <a:p>
+            <a:pPr>
+              <a:spcAft>
+                <a:spcPts val="1000"/>
+              </a:spcAft>
+              <a:defRPr sz="2000">
+                <a:solidFill>
+                  <a:srgbClr val="192332"/>
                 </a:solidFill>
               </a:defRPr>
             </a:pPr>
             <a:r>
-              <a:t>BUILD6™ · WEEK 11 · © 2026 LINK Lake Norman, LLC · All Rights Reserved</a:t>
+              <a:t>Systems thinking</a:t>
+            </a:r>
+          </a:p>
+          <a:p>
+            <a:pPr>
+              <a:spcAft>
+                <a:spcPts val="1000"/>
+              </a:spcAft>
+              <a:defRPr sz="2000">
+                <a:solidFill>
+                  <a:srgbClr val="192332"/>
+                </a:solidFill>
+              </a:defRPr>
+            </a:pPr>
+            <a:r>
+              <a:t>Operations</a:t>
+            </a:r>
+          </a:p>
+          <a:p>
+            <a:pPr>
+              <a:spcAft>
+                <a:spcPts val="1000"/>
+              </a:spcAft>
+              <a:defRPr sz="2000">
+                <a:solidFill>
+                  <a:srgbClr val="192332"/>
+                </a:solidFill>
+              </a:defRPr>
+            </a:pPr>
+            <a:r>
+              <a:t>Workflow</a:t>
+            </a:r>
+          </a:p>
+          <a:p>
+            <a:pPr>
+              <a:spcAft>
+                <a:spcPts val="1000"/>
+              </a:spcAft>
+              <a:defRPr sz="2000">
+                <a:solidFill>
+                  <a:srgbClr val="192332"/>
+                </a:solidFill>
+              </a:defRPr>
+            </a:pPr>
+            <a:r>
+              <a:t>Quality control</a:t>
+            </a:r>
+          </a:p>
+          <a:p>
+            <a:pPr>
+              <a:spcAft>
+                <a:spcPts val="1000"/>
+              </a:spcAft>
+              <a:defRPr sz="2000">
+                <a:solidFill>
+                  <a:srgbClr val="192332"/>
+                </a:solidFill>
+              </a:defRPr>
+            </a:pPr>
+            <a:r>
+              <a:t>Customer experience</a:t>
+            </a:r>
+          </a:p>
+          <a:p>
+            <a:pPr>
+              <a:spcAft>
+                <a:spcPts val="1000"/>
+              </a:spcAft>
+              <a:defRPr sz="2000">
+                <a:solidFill>
+                  <a:srgbClr val="192332"/>
+                </a:solidFill>
+              </a:defRPr>
+            </a:pPr>
+            <a:r>
+              <a:t>Safety</a:t>
+            </a:r>
+          </a:p>
+          <a:p>
+            <a:pPr>
+              <a:spcAft>
+                <a:spcPts val="1000"/>
+              </a:spcAft>
+              <a:defRPr sz="2000">
+                <a:solidFill>
+                  <a:srgbClr val="192332"/>
+                </a:solidFill>
+              </a:defRPr>
+            </a:pPr>
+            <a:r>
+              <a:t>Supply chain awareness</a:t>
+            </a:r>
+          </a:p>
+          <a:p>
+            <a:pPr>
+              <a:spcAft>
+                <a:spcPts val="1000"/>
+              </a:spcAft>
+              <a:defRPr sz="2000">
+                <a:solidFill>
+                  <a:srgbClr val="192332"/>
+                </a:solidFill>
+              </a:defRPr>
+            </a:pPr>
+            <a:r>
+              <a:t>Business economics</a:t>
+            </a:r>
+          </a:p>
+          <a:p>
+            <a:pPr>
+              <a:spcAft>
+                <a:spcPts val="1000"/>
+              </a:spcAft>
+              <a:defRPr sz="2000">
+                <a:solidFill>
+                  <a:srgbClr val="192332"/>
+                </a:solidFill>
+              </a:defRPr>
+            </a:pPr>
+            <a:r>
+              <a:t>Career exploration</a:t>
             </a:r>
           </a:p>
         </p:txBody>
@@ -3330,13 +3578,13 @@
 </p:sld>
 </file>
 
-<file path=ppt/slides/slide10.xml><?xml version="1.0" encoding="utf-8"?>
+<file path=ppt/slides/slide3.xml><?xml version="1.0" encoding="utf-8"?>
 <p:sld xmlns:a="http://schemas.openxmlformats.org/drawingml/2006/main" xmlns:p="http://schemas.openxmlformats.org/presentationml/2006/main" xmlns:r="http://schemas.openxmlformats.org/officeDocument/2006/relationships">
   <p:cSld>
     <p:bg>
       <p:bgPr>
         <a:solidFill>
-          <a:srgbClr val="F5F9FA"/>
+          <a:srgbClr val="F5F7FA"/>
         </a:solidFill>
         <a:effectLst/>
       </p:bgPr>
@@ -3357,13 +3605,13 @@
         <p:spPr>
           <a:xfrm>
             <a:off x="0" y="0"/>
-            <a:ext cx="164592" cy="6858000"/>
+            <a:ext cx="12191695" cy="822960"/>
           </a:xfrm>
           <a:prstGeom prst="rect">
             <a:avLst/>
           </a:prstGeom>
           <a:solidFill>
-            <a:srgbClr val="00A6A6"/>
+            <a:srgbClr val="0D1B3D"/>
           </a:solidFill>
           <a:ln>
             <a:noFill/>
@@ -3399,8 +3647,8 @@
         </p:nvSpPr>
         <p:spPr>
           <a:xfrm>
-            <a:off x="594360" y="411480"/>
-            <a:ext cx="10972800" cy="640080"/>
+            <a:off x="411480" y="146304"/>
+            <a:ext cx="11155680" cy="502920"/>
           </a:xfrm>
           <a:prstGeom prst="rect">
             <a:avLst/>
@@ -3413,16 +3661,13 @@
           </a:bodyPr>
           <a:lstStyle/>
           <a:p>
-            <a:pPr>
-              <a:defRPr sz="2900" b="1">
-                <a:solidFill>
-                  <a:srgbClr val="062B3F"/>
-                </a:solidFill>
-                <a:latin typeface="Aptos Display"/>
-              </a:defRPr>
-            </a:pPr>
-            <a:r>
-              <a:t>Portfolio Evidence</a:t>
+            <a:r>
+              <a:rPr sz="1200" b="1">
+                <a:solidFill>
+                  <a:srgbClr val="F2B705"/>
+                </a:solidFill>
+              </a:rPr>
+              <a:t>TUESDAY</a:t>
             </a:r>
           </a:p>
         </p:txBody>
@@ -3435,8 +3680,8 @@
         </p:nvSpPr>
         <p:spPr>
           <a:xfrm>
-            <a:off x="822960" y="1463040"/>
-            <a:ext cx="10561320" cy="4480560"/>
+            <a:off x="502920" y="1143000"/>
+            <a:ext cx="11064240" cy="1097280"/>
           </a:xfrm>
           <a:prstGeom prst="rect">
             <a:avLst/>
@@ -3444,6 +3689,72 @@
           <a:noFill/>
         </p:spPr>
         <p:txBody>
+          <a:bodyPr wrap="none">
+            <a:spAutoFit/>
+          </a:bodyPr>
+          <a:lstStyle/>
+          <a:p>
+            <a:r>
+              <a:rPr sz="3000" b="1">
+                <a:solidFill>
+                  <a:srgbClr val="0D1B3D"/>
+                </a:solidFill>
+              </a:rPr>
+              <a:t>Business Systems Lab</a:t>
+            </a:r>
+          </a:p>
+        </p:txBody>
+      </p:sp>
+      <p:sp>
+        <p:nvSpPr>
+          <p:cNvPr id="5" name="TextBox 4"/>
+          <p:cNvSpPr txBox="1"/>
+          <p:nvPr/>
+        </p:nvSpPr>
+        <p:spPr>
+          <a:xfrm>
+            <a:off x="530352" y="2148840"/>
+            <a:ext cx="10789920" cy="731520"/>
+          </a:xfrm>
+          <a:prstGeom prst="rect">
+            <a:avLst/>
+          </a:prstGeom>
+          <a:noFill/>
+        </p:spPr>
+        <p:txBody>
+          <a:bodyPr wrap="none">
+            <a:spAutoFit/>
+          </a:bodyPr>
+          <a:lstStyle/>
+          <a:p>
+            <a:r>
+              <a:rPr sz="1600">
+                <a:solidFill>
+                  <a:srgbClr val="3C4655"/>
+                </a:solidFill>
+              </a:rPr>
+              <a:t>Map a customer need from first contact to finished outcome. Identify roles, handoffs, quality checks, delays, waste, customer impact and money impact.</a:t>
+            </a:r>
+          </a:p>
+        </p:txBody>
+      </p:sp>
+      <p:sp>
+        <p:nvSpPr>
+          <p:cNvPr id="6" name="TextBox 5"/>
+          <p:cNvSpPr txBox="1"/>
+          <p:nvPr/>
+        </p:nvSpPr>
+        <p:spPr>
+          <a:xfrm>
+            <a:off x="731520" y="2971800"/>
+            <a:ext cx="10789920" cy="3017520"/>
+          </a:xfrm>
+          <a:prstGeom prst="rect">
+            <a:avLst/>
+          </a:prstGeom>
+          <a:noFill/>
+        </p:spPr>
+        <p:txBody>
           <a:bodyPr wrap="square">
             <a:spAutoFit/>
           </a:bodyPr>
@@ -3451,85 +3762,122 @@
           <a:p>
             <a:pPr>
               <a:spcAft>
-                <a:spcPts val="1400"/>
+                <a:spcPts val="800"/>
               </a:spcAft>
-              <a:defRPr sz="2100">
-                <a:solidFill>
-                  <a:srgbClr val="1B262C"/>
-                </a:solidFill>
-                <a:latin typeface="Aptos"/>
+              <a:defRPr sz="1700">
+                <a:solidFill>
+                  <a:srgbClr val="192332"/>
+                </a:solidFill>
               </a:defRPr>
             </a:pPr>
             <a:r>
-              <a:t>What artifact should I save?</a:t>
+              <a:t>Customer need</a:t>
             </a:r>
           </a:p>
           <a:p>
             <a:pPr>
               <a:spcAft>
-                <a:spcPts val="1400"/>
+                <a:spcPts val="800"/>
               </a:spcAft>
-              <a:defRPr sz="2100">
-                <a:solidFill>
-                  <a:srgbClr val="1B262C"/>
-                </a:solidFill>
-                <a:latin typeface="Aptos"/>
+              <a:defRPr sz="1700">
+                <a:solidFill>
+                  <a:srgbClr val="192332"/>
+                </a:solidFill>
               </a:defRPr>
             </a:pPr>
             <a:r>
-              <a:t>What does this evidence show about me?</a:t>
+              <a:t>Workflow steps</a:t>
             </a:r>
           </a:p>
           <a:p>
             <a:pPr>
               <a:spcAft>
-                <a:spcPts val="1400"/>
+                <a:spcPts val="800"/>
               </a:spcAft>
-              <a:defRPr sz="2100">
-                <a:solidFill>
-                  <a:srgbClr val="1B262C"/>
-                </a:solidFill>
-                <a:latin typeface="Aptos"/>
+              <a:defRPr sz="1700">
+                <a:solidFill>
+                  <a:srgbClr val="192332"/>
+                </a:solidFill>
               </a:defRPr>
             </a:pPr>
             <a:r>
-              <a:t>Which BUILD6 skill does it demonstrate?</a:t>
+              <a:t>Roles / responsibilities</a:t>
             </a:r>
           </a:p>
           <a:p>
             <a:pPr>
               <a:spcAft>
-                <a:spcPts val="1400"/>
+                <a:spcPts val="800"/>
               </a:spcAft>
-              <a:defRPr sz="2100">
-                <a:solidFill>
-                  <a:srgbClr val="1B262C"/>
-                </a:solidFill>
-                <a:latin typeface="Aptos"/>
+              <a:defRPr sz="1700">
+                <a:solidFill>
+                  <a:srgbClr val="192332"/>
+                </a:solidFill>
               </a:defRPr>
             </a:pPr>
             <a:r>
-              <a:t>Would someone outside this class understand why it matters?</a:t>
-            </a:r>
-          </a:p>
-        </p:txBody>
-      </p:sp>
-      <p:sp>
-        <p:nvSpPr>
-          <p:cNvPr id="5" name="Rectangle 4"/>
+              <a:t>Handoffs</a:t>
+            </a:r>
+          </a:p>
+          <a:p>
+            <a:pPr>
+              <a:spcAft>
+                <a:spcPts val="800"/>
+              </a:spcAft>
+              <a:defRPr sz="1700">
+                <a:solidFill>
+                  <a:srgbClr val="192332"/>
+                </a:solidFill>
+              </a:defRPr>
+            </a:pPr>
+            <a:r>
+              <a:t>Quality / safety checks</a:t>
+            </a:r>
+          </a:p>
+        </p:txBody>
+      </p:sp>
+    </p:spTree>
+  </p:cSld>
+  <p:clrMapOvr>
+    <a:masterClrMapping/>
+  </p:clrMapOvr>
+</p:sld>
+</file>
+
+<file path=ppt/slides/slide4.xml><?xml version="1.0" encoding="utf-8"?>
+<p:sld xmlns:a="http://schemas.openxmlformats.org/drawingml/2006/main" xmlns:p="http://schemas.openxmlformats.org/presentationml/2006/main" xmlns:r="http://schemas.openxmlformats.org/officeDocument/2006/relationships">
+  <p:cSld>
+    <p:bg>
+      <p:bgPr>
+        <a:solidFill>
+          <a:srgbClr val="F5F7FA"/>
+        </a:solidFill>
+        <a:effectLst/>
+      </p:bgPr>
+    </p:bg>
+    <p:spTree>
+      <p:nvGrpSpPr>
+        <p:cNvPr id="1" name=""/>
+        <p:cNvGrpSpPr/>
+        <p:nvPr/>
+      </p:nvGrpSpPr>
+      <p:grpSpPr/>
+      <p:sp>
+        <p:nvSpPr>
+          <p:cNvPr id="2" name="Rectangle 1"/>
           <p:cNvSpPr/>
           <p:nvPr/>
         </p:nvSpPr>
         <p:spPr>
           <a:xfrm>
-            <a:off x="0" y="6446520"/>
-            <a:ext cx="12191695" cy="411480"/>
+            <a:off x="0" y="0"/>
+            <a:ext cx="12191695" cy="822960"/>
           </a:xfrm>
           <a:prstGeom prst="rect">
             <a:avLst/>
           </a:prstGeom>
           <a:solidFill>
-            <a:srgbClr val="062B3F"/>
+            <a:srgbClr val="0D1B3D"/>
           </a:solidFill>
           <a:ln>
             <a:noFill/>
@@ -3559,14 +3907,14 @@
       </p:sp>
       <p:sp>
         <p:nvSpPr>
-          <p:cNvPr id="6" name="TextBox 5"/>
+          <p:cNvPr id="3" name="TextBox 2"/>
           <p:cNvSpPr txBox="1"/>
           <p:nvPr/>
         </p:nvSpPr>
         <p:spPr>
           <a:xfrm>
-            <a:off x="457200" y="6510528"/>
-            <a:ext cx="11247120" cy="182880"/>
+            <a:off x="411480" y="146304"/>
+            <a:ext cx="11155680" cy="502920"/>
           </a:xfrm>
           <a:prstGeom prst="rect">
             <a:avLst/>
@@ -3579,15 +3927,177 @@
           </a:bodyPr>
           <a:lstStyle/>
           <a:p>
-            <a:pPr algn="ctr">
-              <a:defRPr sz="900">
-                <a:solidFill>
-                  <a:srgbClr val="FFFFFF"/>
+            <a:r>
+              <a:rPr sz="1200" b="1">
+                <a:solidFill>
+                  <a:srgbClr val="F2B705"/>
+                </a:solidFill>
+              </a:rPr>
+              <a:t>WEDNESDAY</a:t>
+            </a:r>
+          </a:p>
+        </p:txBody>
+      </p:sp>
+      <p:sp>
+        <p:nvSpPr>
+          <p:cNvPr id="4" name="TextBox 3"/>
+          <p:cNvSpPr txBox="1"/>
+          <p:nvPr/>
+        </p:nvSpPr>
+        <p:spPr>
+          <a:xfrm>
+            <a:off x="502920" y="1143000"/>
+            <a:ext cx="11064240" cy="1097280"/>
+          </a:xfrm>
+          <a:prstGeom prst="rect">
+            <a:avLst/>
+          </a:prstGeom>
+          <a:noFill/>
+        </p:spPr>
+        <p:txBody>
+          <a:bodyPr wrap="none">
+            <a:spAutoFit/>
+          </a:bodyPr>
+          <a:lstStyle/>
+          <a:p>
+            <a:r>
+              <a:rPr sz="3000" b="1">
+                <a:solidFill>
+                  <a:srgbClr val="0D1B3D"/>
+                </a:solidFill>
+              </a:rPr>
+              <a:t>Champion Research</a:t>
+            </a:r>
+          </a:p>
+        </p:txBody>
+      </p:sp>
+      <p:sp>
+        <p:nvSpPr>
+          <p:cNvPr id="5" name="TextBox 4"/>
+          <p:cNvSpPr txBox="1"/>
+          <p:nvPr/>
+        </p:nvSpPr>
+        <p:spPr>
+          <a:xfrm>
+            <a:off x="530352" y="2148840"/>
+            <a:ext cx="10789920" cy="731520"/>
+          </a:xfrm>
+          <a:prstGeom prst="rect">
+            <a:avLst/>
+          </a:prstGeom>
+          <a:noFill/>
+        </p:spPr>
+        <p:txBody>
+          <a:bodyPr wrap="none">
+            <a:spAutoFit/>
+          </a:bodyPr>
+          <a:lstStyle/>
+          <a:p>
+            <a:r>
+              <a:rPr sz="1600">
+                <a:solidFill>
+                  <a:srgbClr val="3C4655"/>
+                </a:solidFill>
+              </a:rPr>
+              <a:t>Research products/services, customers, problems solved, likely workflow, technology, safety, careers and tour questions.</a:t>
+            </a:r>
+          </a:p>
+        </p:txBody>
+      </p:sp>
+      <p:sp>
+        <p:nvSpPr>
+          <p:cNvPr id="6" name="TextBox 5"/>
+          <p:cNvSpPr txBox="1"/>
+          <p:nvPr/>
+        </p:nvSpPr>
+        <p:spPr>
+          <a:xfrm>
+            <a:off x="731520" y="2971800"/>
+            <a:ext cx="10789920" cy="3017520"/>
+          </a:xfrm>
+          <a:prstGeom prst="rect">
+            <a:avLst/>
+          </a:prstGeom>
+          <a:noFill/>
+        </p:spPr>
+        <p:txBody>
+          <a:bodyPr wrap="square">
+            <a:spAutoFit/>
+          </a:bodyPr>
+          <a:lstStyle/>
+          <a:p>
+            <a:pPr>
+              <a:spcAft>
+                <a:spcPts val="800"/>
+              </a:spcAft>
+              <a:defRPr sz="1700">
+                <a:solidFill>
+                  <a:srgbClr val="192332"/>
                 </a:solidFill>
               </a:defRPr>
             </a:pPr>
             <a:r>
-              <a:t>BUILD6™ · WEEK 11 · © 2026 LINK Lake Norman, LLC · All Rights Reserved</a:t>
+              <a:t>Products/services</a:t>
+            </a:r>
+          </a:p>
+          <a:p>
+            <a:pPr>
+              <a:spcAft>
+                <a:spcPts val="800"/>
+              </a:spcAft>
+              <a:defRPr sz="1700">
+                <a:solidFill>
+                  <a:srgbClr val="192332"/>
+                </a:solidFill>
+              </a:defRPr>
+            </a:pPr>
+            <a:r>
+              <a:t>Customers and problems solved</a:t>
+            </a:r>
+          </a:p>
+          <a:p>
+            <a:pPr>
+              <a:spcAft>
+                <a:spcPts val="800"/>
+              </a:spcAft>
+              <a:defRPr sz="1700">
+                <a:solidFill>
+                  <a:srgbClr val="192332"/>
+                </a:solidFill>
+              </a:defRPr>
+            </a:pPr>
+            <a:r>
+              <a:t>My workflow hypothesis</a:t>
+            </a:r>
+          </a:p>
+          <a:p>
+            <a:pPr>
+              <a:spcAft>
+                <a:spcPts val="800"/>
+              </a:spcAft>
+              <a:defRPr sz="1700">
+                <a:solidFill>
+                  <a:srgbClr val="192332"/>
+                </a:solidFill>
+              </a:defRPr>
+            </a:pPr>
+            <a:r>
+              <a:t>Technology / safety I expect to see</a:t>
+            </a:r>
+          </a:p>
+          <a:p>
+            <a:pPr>
+              <a:spcAft>
+                <a:spcPts val="800"/>
+              </a:spcAft>
+              <a:defRPr sz="1700">
+                <a:solidFill>
+                  <a:srgbClr val="192332"/>
+                </a:solidFill>
+              </a:defRPr>
+            </a:pPr>
+            <a:r>
+              <a:t>Hidden careers I want to look for</a:t>
             </a:r>
           </a:p>
         </p:txBody>
@@ -3600,13 +4110,13 @@
 </p:sld>
 </file>
 
-<file path=ppt/slides/slide11.xml><?xml version="1.0" encoding="utf-8"?>
+<file path=ppt/slides/slide5.xml><?xml version="1.0" encoding="utf-8"?>
 <p:sld xmlns:a="http://schemas.openxmlformats.org/drawingml/2006/main" xmlns:p="http://schemas.openxmlformats.org/presentationml/2006/main" xmlns:r="http://schemas.openxmlformats.org/officeDocument/2006/relationships">
   <p:cSld>
     <p:bg>
       <p:bgPr>
         <a:solidFill>
-          <a:srgbClr val="F5F9FA"/>
+          <a:srgbClr val="F5F7FA"/>
         </a:solidFill>
         <a:effectLst/>
       </p:bgPr>
@@ -3627,13 +4137,13 @@
         <p:spPr>
           <a:xfrm>
             <a:off x="0" y="0"/>
-            <a:ext cx="164592" cy="6858000"/>
+            <a:ext cx="12191695" cy="822960"/>
           </a:xfrm>
           <a:prstGeom prst="rect">
             <a:avLst/>
           </a:prstGeom>
           <a:solidFill>
-            <a:srgbClr val="00A6A6"/>
+            <a:srgbClr val="0D1B3D"/>
           </a:solidFill>
           <a:ln>
             <a:noFill/>
@@ -3669,8 +4179,8 @@
         </p:nvSpPr>
         <p:spPr>
           <a:xfrm>
-            <a:off x="594360" y="411480"/>
-            <a:ext cx="10972800" cy="640080"/>
+            <a:off x="411480" y="146304"/>
+            <a:ext cx="11155680" cy="502920"/>
           </a:xfrm>
           <a:prstGeom prst="rect">
             <a:avLst/>
@@ -3683,16 +4193,13 @@
           </a:bodyPr>
           <a:lstStyle/>
           <a:p>
-            <a:pPr>
-              <a:defRPr sz="2900" b="1">
-                <a:solidFill>
-                  <a:srgbClr val="062B3F"/>
-                </a:solidFill>
-                <a:latin typeface="Aptos Display"/>
-              </a:defRPr>
-            </a:pPr>
-            <a:r>
-              <a:t>Capstone Connection</a:t>
+            <a:r>
+              <a:rPr sz="1200" b="1">
+                <a:solidFill>
+                  <a:srgbClr val="F2B705"/>
+                </a:solidFill>
+              </a:rPr>
+              <a:t>THURSDAY</a:t>
             </a:r>
           </a:p>
         </p:txBody>
@@ -3705,8 +4212,8 @@
         </p:nvSpPr>
         <p:spPr>
           <a:xfrm>
-            <a:off x="822960" y="1463040"/>
-            <a:ext cx="10561320" cy="4480560"/>
+            <a:off x="502920" y="1143000"/>
+            <a:ext cx="11064240" cy="1097280"/>
           </a:xfrm>
           <a:prstGeom prst="rect">
             <a:avLst/>
@@ -3714,6 +4221,72 @@
           <a:noFill/>
         </p:spPr>
         <p:txBody>
+          <a:bodyPr wrap="none">
+            <a:spAutoFit/>
+          </a:bodyPr>
+          <a:lstStyle/>
+          <a:p>
+            <a:r>
+              <a:rPr sz="3000" b="1">
+                <a:solidFill>
+                  <a:srgbClr val="0D1B3D"/>
+                </a:solidFill>
+              </a:rPr>
+              <a:t>Operations Detective Tour</a:t>
+            </a:r>
+          </a:p>
+        </p:txBody>
+      </p:sp>
+      <p:sp>
+        <p:nvSpPr>
+          <p:cNvPr id="5" name="TextBox 4"/>
+          <p:cNvSpPr txBox="1"/>
+          <p:nvPr/>
+        </p:nvSpPr>
+        <p:spPr>
+          <a:xfrm>
+            <a:off x="530352" y="2148840"/>
+            <a:ext cx="10789920" cy="731520"/>
+          </a:xfrm>
+          <a:prstGeom prst="rect">
+            <a:avLst/>
+          </a:prstGeom>
+          <a:noFill/>
+        </p:spPr>
+        <p:txBody>
+          <a:bodyPr wrap="none">
+            <a:spAutoFit/>
+          </a:bodyPr>
+          <a:lstStyle/>
+          <a:p>
+            <a:r>
+              <a:rPr sz="1600">
+                <a:solidFill>
+                  <a:srgbClr val="3C4655"/>
+                </a:solidFill>
+              </a:rPr>
+              <a:t>Wear closed-toe shoes. Observe one workflow, quality-control point, customer-service moment, technology use, safety practice, teamwork/leadership behavior and unexpected career.</a:t>
+            </a:r>
+          </a:p>
+        </p:txBody>
+      </p:sp>
+      <p:sp>
+        <p:nvSpPr>
+          <p:cNvPr id="6" name="TextBox 5"/>
+          <p:cNvSpPr txBox="1"/>
+          <p:nvPr/>
+        </p:nvSpPr>
+        <p:spPr>
+          <a:xfrm>
+            <a:off x="731520" y="2971800"/>
+            <a:ext cx="10789920" cy="3017520"/>
+          </a:xfrm>
+          <a:prstGeom prst="rect">
+            <a:avLst/>
+          </a:prstGeom>
+          <a:noFill/>
+        </p:spPr>
+        <p:txBody>
           <a:bodyPr wrap="square">
             <a:spAutoFit/>
           </a:bodyPr>
@@ -3721,85 +4294,122 @@
           <a:p>
             <a:pPr>
               <a:spcAft>
-                <a:spcPts val="1400"/>
+                <a:spcPts val="800"/>
               </a:spcAft>
-              <a:defRPr sz="2100">
-                <a:solidFill>
-                  <a:srgbClr val="1B262C"/>
-                </a:solidFill>
-                <a:latin typeface="Aptos"/>
+              <a:defRPr sz="1700">
+                <a:solidFill>
+                  <a:srgbClr val="192332"/>
+                </a:solidFill>
               </a:defRPr>
             </a:pPr>
             <a:r>
-              <a:t>What changed in how I see myself?</a:t>
+              <a:t>One workflow</a:t>
             </a:r>
           </a:p>
           <a:p>
             <a:pPr>
               <a:spcAft>
-                <a:spcPts val="1400"/>
+                <a:spcPts val="800"/>
               </a:spcAft>
-              <a:defRPr sz="2100">
-                <a:solidFill>
-                  <a:srgbClr val="1B262C"/>
-                </a:solidFill>
-                <a:latin typeface="Aptos"/>
+              <a:defRPr sz="1700">
+                <a:solidFill>
+                  <a:srgbClr val="192332"/>
+                </a:solidFill>
               </a:defRPr>
             </a:pPr>
             <a:r>
-              <a:t>What changed in how I see work or opportunity?</a:t>
+              <a:t>One quality-control point</a:t>
             </a:r>
           </a:p>
           <a:p>
             <a:pPr>
               <a:spcAft>
-                <a:spcPts val="1400"/>
+                <a:spcPts val="800"/>
               </a:spcAft>
-              <a:defRPr sz="2100">
-                <a:solidFill>
-                  <a:srgbClr val="1B262C"/>
-                </a:solidFill>
-                <a:latin typeface="Aptos"/>
+              <a:defRPr sz="1700">
+                <a:solidFill>
+                  <a:srgbClr val="192332"/>
+                </a:solidFill>
               </a:defRPr>
             </a:pPr>
             <a:r>
-              <a:t>Which piece of evidence belongs in my final story?</a:t>
+              <a:t>One customer-service moment</a:t>
             </a:r>
           </a:p>
           <a:p>
             <a:pPr>
               <a:spcAft>
-                <a:spcPts val="1400"/>
+                <a:spcPts val="800"/>
               </a:spcAft>
-              <a:defRPr sz="2100">
-                <a:solidFill>
-                  <a:srgbClr val="1B262C"/>
-                </a:solidFill>
-                <a:latin typeface="Aptos"/>
+              <a:defRPr sz="1700">
+                <a:solidFill>
+                  <a:srgbClr val="192332"/>
+                </a:solidFill>
               </a:defRPr>
             </a:pPr>
             <a:r>
-              <a:t>Mark it now so you do not have to reconstruct the semester later.</a:t>
-            </a:r>
-          </a:p>
-        </p:txBody>
-      </p:sp>
-      <p:sp>
-        <p:nvSpPr>
-          <p:cNvPr id="5" name="Rectangle 4"/>
+              <a:t>One technology use</a:t>
+            </a:r>
+          </a:p>
+          <a:p>
+            <a:pPr>
+              <a:spcAft>
+                <a:spcPts val="800"/>
+              </a:spcAft>
+              <a:defRPr sz="1700">
+                <a:solidFill>
+                  <a:srgbClr val="192332"/>
+                </a:solidFill>
+              </a:defRPr>
+            </a:pPr>
+            <a:r>
+              <a:t>One safety practice</a:t>
+            </a:r>
+          </a:p>
+        </p:txBody>
+      </p:sp>
+    </p:spTree>
+  </p:cSld>
+  <p:clrMapOvr>
+    <a:masterClrMapping/>
+  </p:clrMapOvr>
+</p:sld>
+</file>
+
+<file path=ppt/slides/slide6.xml><?xml version="1.0" encoding="utf-8"?>
+<p:sld xmlns:a="http://schemas.openxmlformats.org/drawingml/2006/main" xmlns:p="http://schemas.openxmlformats.org/presentationml/2006/main" xmlns:r="http://schemas.openxmlformats.org/officeDocument/2006/relationships">
+  <p:cSld>
+    <p:bg>
+      <p:bgPr>
+        <a:solidFill>
+          <a:srgbClr val="F5F7FA"/>
+        </a:solidFill>
+        <a:effectLst/>
+      </p:bgPr>
+    </p:bg>
+    <p:spTree>
+      <p:nvGrpSpPr>
+        <p:cNvPr id="1" name=""/>
+        <p:cNvGrpSpPr/>
+        <p:nvPr/>
+      </p:nvGrpSpPr>
+      <p:grpSpPr/>
+      <p:sp>
+        <p:nvSpPr>
+          <p:cNvPr id="2" name="Rectangle 1"/>
           <p:cNvSpPr/>
           <p:nvPr/>
         </p:nvSpPr>
         <p:spPr>
           <a:xfrm>
-            <a:off x="0" y="6446520"/>
-            <a:ext cx="12191695" cy="411480"/>
+            <a:off x="0" y="0"/>
+            <a:ext cx="12191695" cy="822960"/>
           </a:xfrm>
           <a:prstGeom prst="rect">
             <a:avLst/>
           </a:prstGeom>
           <a:solidFill>
-            <a:srgbClr val="062B3F"/>
+            <a:srgbClr val="0D1B3D"/>
           </a:solidFill>
           <a:ln>
             <a:noFill/>
@@ -3829,14 +4439,14 @@
       </p:sp>
       <p:sp>
         <p:nvSpPr>
-          <p:cNvPr id="6" name="TextBox 5"/>
+          <p:cNvPr id="3" name="TextBox 2"/>
           <p:cNvSpPr txBox="1"/>
           <p:nvPr/>
         </p:nvSpPr>
         <p:spPr>
           <a:xfrm>
-            <a:off x="457200" y="6510528"/>
-            <a:ext cx="11247120" cy="182880"/>
+            <a:off x="411480" y="146304"/>
+            <a:ext cx="11155680" cy="502920"/>
           </a:xfrm>
           <a:prstGeom prst="rect">
             <a:avLst/>
@@ -3849,98 +4459,27 @@
           </a:bodyPr>
           <a:lstStyle/>
           <a:p>
-            <a:pPr algn="ctr">
-              <a:defRPr sz="900">
-                <a:solidFill>
-                  <a:srgbClr val="FFFFFF"/>
-                </a:solidFill>
-              </a:defRPr>
-            </a:pPr>
-            <a:r>
-              <a:t>BUILD6™ · WEEK 11 · © 2026 LINK Lake Norman, LLC · All Rights Reserved</a:t>
-            </a:r>
-          </a:p>
-        </p:txBody>
-      </p:sp>
-    </p:spTree>
-  </p:cSld>
-  <p:clrMapOvr>
-    <a:masterClrMapping/>
-  </p:clrMapOvr>
-</p:sld>
-</file>
-
-<file path=ppt/slides/slide12.xml><?xml version="1.0" encoding="utf-8"?>
-<p:sld xmlns:a="http://schemas.openxmlformats.org/drawingml/2006/main" xmlns:p="http://schemas.openxmlformats.org/presentationml/2006/main" xmlns:r="http://schemas.openxmlformats.org/officeDocument/2006/relationships">
-  <p:cSld>
-    <p:bg>
-      <p:bgPr>
-        <a:solidFill>
-          <a:srgbClr val="F5F9FA"/>
-        </a:solidFill>
-        <a:effectLst/>
-      </p:bgPr>
-    </p:bg>
-    <p:spTree>
-      <p:nvGrpSpPr>
-        <p:cNvPr id="1" name=""/>
-        <p:cNvGrpSpPr/>
-        <p:nvPr/>
-      </p:nvGrpSpPr>
-      <p:grpSpPr/>
-      <p:sp>
-        <p:nvSpPr>
-          <p:cNvPr id="2" name="Rectangle 1"/>
-          <p:cNvSpPr/>
-          <p:nvPr/>
-        </p:nvSpPr>
-        <p:spPr>
-          <a:xfrm>
-            <a:off x="0" y="0"/>
-            <a:ext cx="164592" cy="6858000"/>
-          </a:xfrm>
-          <a:prstGeom prst="rect">
-            <a:avLst/>
-          </a:prstGeom>
-          <a:solidFill>
-            <a:srgbClr val="00A6A6"/>
-          </a:solidFill>
-          <a:ln>
-            <a:noFill/>
-          </a:ln>
-        </p:spPr>
-        <p:style>
-          <a:lnRef idx="1">
-            <a:schemeClr val="accent1"/>
-          </a:lnRef>
-          <a:fillRef idx="3">
-            <a:schemeClr val="accent1"/>
-          </a:fillRef>
-          <a:effectRef idx="2">
-            <a:schemeClr val="accent1"/>
-          </a:effectRef>
-          <a:fontRef idx="minor">
-            <a:schemeClr val="lt1"/>
-          </a:fontRef>
-        </p:style>
-        <p:txBody>
-          <a:bodyPr rtlCol="0" anchor="ctr"/>
-          <a:lstStyle/>
-          <a:p>
-            <a:pPr algn="ctr"/>
-          </a:p>
-        </p:txBody>
-      </p:sp>
-      <p:sp>
-        <p:nvSpPr>
-          <p:cNvPr id="3" name="TextBox 2"/>
+            <a:r>
+              <a:rPr sz="1200" b="1">
+                <a:solidFill>
+                  <a:srgbClr val="F2B705"/>
+                </a:solidFill>
+              </a:rPr>
+              <a:t>FRIDAY</a:t>
+            </a:r>
+          </a:p>
+        </p:txBody>
+      </p:sp>
+      <p:sp>
+        <p:nvSpPr>
+          <p:cNvPr id="4" name="TextBox 3"/>
           <p:cNvSpPr txBox="1"/>
           <p:nvPr/>
         </p:nvSpPr>
         <p:spPr>
           <a:xfrm>
-            <a:off x="594360" y="411480"/>
-            <a:ext cx="10972800" cy="640080"/>
+            <a:off x="502920" y="1143000"/>
+            <a:ext cx="11064240" cy="1097280"/>
           </a:xfrm>
           <a:prstGeom prst="rect">
             <a:avLst/>
@@ -3953,30 +4492,27 @@
           </a:bodyPr>
           <a:lstStyle/>
           <a:p>
-            <a:pPr>
-              <a:defRPr sz="2900" b="1">
-                <a:solidFill>
-                  <a:srgbClr val="062B3F"/>
-                </a:solidFill>
-                <a:latin typeface="Aptos Display"/>
-              </a:defRPr>
-            </a:pPr>
-            <a:r>
-              <a:t>What Comes Next</a:t>
-            </a:r>
-          </a:p>
-        </p:txBody>
-      </p:sp>
-      <p:sp>
-        <p:nvSpPr>
-          <p:cNvPr id="4" name="TextBox 3"/>
+            <a:r>
+              <a:rPr sz="3000" b="1">
+                <a:solidFill>
+                  <a:srgbClr val="0D1B3D"/>
+                </a:solidFill>
+              </a:rPr>
+              <a:t>Friday Closeout</a:t>
+            </a:r>
+          </a:p>
+        </p:txBody>
+      </p:sp>
+      <p:sp>
+        <p:nvSpPr>
+          <p:cNvPr id="5" name="TextBox 4"/>
           <p:cNvSpPr txBox="1"/>
           <p:nvPr/>
         </p:nvSpPr>
         <p:spPr>
           <a:xfrm>
-            <a:off x="822960" y="1463040"/>
-            <a:ext cx="10561320" cy="4480560"/>
+            <a:off x="731520" y="2011680"/>
+            <a:ext cx="10789920" cy="4297680"/>
           </a:xfrm>
           <a:prstGeom prst="rect">
             <a:avLst/>
@@ -3991,2191 +4527,46 @@
           <a:p>
             <a:pPr>
               <a:spcAft>
-                <a:spcPts val="1400"/>
+                <a:spcPts val="1000"/>
               </a:spcAft>
-              <a:defRPr sz="2100">
-                <a:solidFill>
-                  <a:srgbClr val="1B262C"/>
-                </a:solidFill>
-                <a:latin typeface="Aptos"/>
+              <a:defRPr sz="1600">
+                <a:solidFill>
+                  <a:srgbClr val="192332"/>
+                </a:solidFill>
               </a:defRPr>
             </a:pPr>
             <a:r>
-              <a:t>Bring that story into Michelle Boudin's communication and on-camera session.</a:t>
+              <a:t>What did Champion Tire &amp; Wheel show me about how one person's work affects customers, quality, safety, time, money, and the rest of the team?</a:t>
             </a:r>
           </a:p>
           <a:p>
             <a:pPr>
               <a:spcAft>
-                <a:spcPts val="1400"/>
+                <a:spcPts val="1000"/>
               </a:spcAft>
-              <a:defRPr sz="2100">
-                <a:solidFill>
-                  <a:srgbClr val="1B262C"/>
-                </a:solidFill>
-                <a:latin typeface="Aptos"/>
+              <a:defRPr sz="1600">
+                <a:solidFill>
+                  <a:srgbClr val="192332"/>
+                </a:solidFill>
               </a:defRPr>
             </a:pPr>
             <a:r>
-              <a:t>Complete the weekly reflection.</a:t>
+              <a:t>Portfolio artifact: Business Workflow Map + Champion Operations Detective + Career/Skill Map</a:t>
             </a:r>
           </a:p>
           <a:p>
             <a:pPr>
               <a:spcAft>
-                <a:spcPts val="1400"/>
+                <a:spcPts val="1000"/>
               </a:spcAft>
-              <a:defRPr sz="2100">
-                <a:solidFill>
-                  <a:srgbClr val="1B262C"/>
-                </a:solidFill>
-                <a:latin typeface="Aptos"/>
+              <a:defRPr sz="1600">
+                <a:solidFill>
+                  <a:srgbClr val="192332"/>
+                </a:solidFill>
               </a:defRPr>
             </a:pPr>
             <a:r>
-              <a:t>Save your evidence.</a:t>
-            </a:r>
-          </a:p>
-          <a:p>
-            <a:pPr>
-              <a:spcAft>
-                <a:spcPts val="1400"/>
-              </a:spcAft>
-              <a:defRPr sz="2100">
-                <a:solidFill>
-                  <a:srgbClr val="1B262C"/>
-                </a:solidFill>
-                <a:latin typeface="Aptos"/>
-              </a:defRPr>
-            </a:pPr>
-            <a:r>
-              <a:t>Keep building the story of who you are becoming.</a:t>
-            </a:r>
-          </a:p>
-        </p:txBody>
-      </p:sp>
-      <p:sp>
-        <p:nvSpPr>
-          <p:cNvPr id="5" name="Rectangle 4"/>
-          <p:cNvSpPr/>
-          <p:nvPr/>
-        </p:nvSpPr>
-        <p:spPr>
-          <a:xfrm>
-            <a:off x="0" y="6446520"/>
-            <a:ext cx="12191695" cy="411480"/>
-          </a:xfrm>
-          <a:prstGeom prst="rect">
-            <a:avLst/>
-          </a:prstGeom>
-          <a:solidFill>
-            <a:srgbClr val="062B3F"/>
-          </a:solidFill>
-          <a:ln>
-            <a:noFill/>
-          </a:ln>
-        </p:spPr>
-        <p:style>
-          <a:lnRef idx="1">
-            <a:schemeClr val="accent1"/>
-          </a:lnRef>
-          <a:fillRef idx="3">
-            <a:schemeClr val="accent1"/>
-          </a:fillRef>
-          <a:effectRef idx="2">
-            <a:schemeClr val="accent1"/>
-          </a:effectRef>
-          <a:fontRef idx="minor">
-            <a:schemeClr val="lt1"/>
-          </a:fontRef>
-        </p:style>
-        <p:txBody>
-          <a:bodyPr rtlCol="0" anchor="ctr"/>
-          <a:lstStyle/>
-          <a:p>
-            <a:pPr algn="ctr"/>
-          </a:p>
-        </p:txBody>
-      </p:sp>
-      <p:sp>
-        <p:nvSpPr>
-          <p:cNvPr id="6" name="TextBox 5"/>
-          <p:cNvSpPr txBox="1"/>
-          <p:nvPr/>
-        </p:nvSpPr>
-        <p:spPr>
-          <a:xfrm>
-            <a:off x="457200" y="6510528"/>
-            <a:ext cx="11247120" cy="182880"/>
-          </a:xfrm>
-          <a:prstGeom prst="rect">
-            <a:avLst/>
-          </a:prstGeom>
-          <a:noFill/>
-        </p:spPr>
-        <p:txBody>
-          <a:bodyPr wrap="none">
-            <a:spAutoFit/>
-          </a:bodyPr>
-          <a:lstStyle/>
-          <a:p>
-            <a:pPr algn="ctr">
-              <a:defRPr sz="900">
-                <a:solidFill>
-                  <a:srgbClr val="FFFFFF"/>
-                </a:solidFill>
-              </a:defRPr>
-            </a:pPr>
-            <a:r>
-              <a:t>BUILD6™ · WEEK 11 · © 2026 LINK Lake Norman, LLC · All Rights Reserved</a:t>
-            </a:r>
-          </a:p>
-        </p:txBody>
-      </p:sp>
-    </p:spTree>
-  </p:cSld>
-  <p:clrMapOvr>
-    <a:masterClrMapping/>
-  </p:clrMapOvr>
-</p:sld>
-</file>
-
-<file path=ppt/slides/slide2.xml><?xml version="1.0" encoding="utf-8"?>
-<p:sld xmlns:a="http://schemas.openxmlformats.org/drawingml/2006/main" xmlns:p="http://schemas.openxmlformats.org/presentationml/2006/main" xmlns:r="http://schemas.openxmlformats.org/officeDocument/2006/relationships">
-  <p:cSld>
-    <p:bg>
-      <p:bgPr>
-        <a:solidFill>
-          <a:srgbClr val="F5F9FA"/>
-        </a:solidFill>
-        <a:effectLst/>
-      </p:bgPr>
-    </p:bg>
-    <p:spTree>
-      <p:nvGrpSpPr>
-        <p:cNvPr id="1" name=""/>
-        <p:cNvGrpSpPr/>
-        <p:nvPr/>
-      </p:nvGrpSpPr>
-      <p:grpSpPr/>
-      <p:sp>
-        <p:nvSpPr>
-          <p:cNvPr id="2" name="Rectangle 1"/>
-          <p:cNvSpPr/>
-          <p:nvPr/>
-        </p:nvSpPr>
-        <p:spPr>
-          <a:xfrm>
-            <a:off x="0" y="0"/>
-            <a:ext cx="164592" cy="6858000"/>
-          </a:xfrm>
-          <a:prstGeom prst="rect">
-            <a:avLst/>
-          </a:prstGeom>
-          <a:solidFill>
-            <a:srgbClr val="00A6A6"/>
-          </a:solidFill>
-          <a:ln>
-            <a:noFill/>
-          </a:ln>
-        </p:spPr>
-        <p:style>
-          <a:lnRef idx="1">
-            <a:schemeClr val="accent1"/>
-          </a:lnRef>
-          <a:fillRef idx="3">
-            <a:schemeClr val="accent1"/>
-          </a:fillRef>
-          <a:effectRef idx="2">
-            <a:schemeClr val="accent1"/>
-          </a:effectRef>
-          <a:fontRef idx="minor">
-            <a:schemeClr val="lt1"/>
-          </a:fontRef>
-        </p:style>
-        <p:txBody>
-          <a:bodyPr rtlCol="0" anchor="ctr"/>
-          <a:lstStyle/>
-          <a:p>
-            <a:pPr algn="ctr"/>
-          </a:p>
-        </p:txBody>
-      </p:sp>
-      <p:sp>
-        <p:nvSpPr>
-          <p:cNvPr id="3" name="TextBox 2"/>
-          <p:cNvSpPr txBox="1"/>
-          <p:nvPr/>
-        </p:nvSpPr>
-        <p:spPr>
-          <a:xfrm>
-            <a:off x="594360" y="411480"/>
-            <a:ext cx="10972800" cy="640080"/>
-          </a:xfrm>
-          <a:prstGeom prst="rect">
-            <a:avLst/>
-          </a:prstGeom>
-          <a:noFill/>
-        </p:spPr>
-        <p:txBody>
-          <a:bodyPr wrap="none">
-            <a:spAutoFit/>
-          </a:bodyPr>
-          <a:lstStyle/>
-          <a:p>
-            <a:pPr>
-              <a:defRPr sz="2900" b="1">
-                <a:solidFill>
-                  <a:srgbClr val="062B3F"/>
-                </a:solidFill>
-                <a:latin typeface="Aptos Display"/>
-              </a:defRPr>
-            </a:pPr>
-            <a:r>
-              <a:t>Why This Week Matters</a:t>
-            </a:r>
-          </a:p>
-        </p:txBody>
-      </p:sp>
-      <p:sp>
-        <p:nvSpPr>
-          <p:cNvPr id="4" name="TextBox 3"/>
-          <p:cNvSpPr txBox="1"/>
-          <p:nvPr/>
-        </p:nvSpPr>
-        <p:spPr>
-          <a:xfrm>
-            <a:off x="822960" y="1463040"/>
-            <a:ext cx="10561320" cy="4480560"/>
-          </a:xfrm>
-          <a:prstGeom prst="rect">
-            <a:avLst/>
-          </a:prstGeom>
-          <a:noFill/>
-        </p:spPr>
-        <p:txBody>
-          <a:bodyPr wrap="square">
-            <a:spAutoFit/>
-          </a:bodyPr>
-          <a:lstStyle/>
-          <a:p>
-            <a:pPr>
-              <a:spcAft>
-                <a:spcPts val="1400"/>
-              </a:spcAft>
-              <a:defRPr sz="2100">
-                <a:solidFill>
-                  <a:srgbClr val="1B262C"/>
-                </a:solidFill>
-                <a:latin typeface="Aptos"/>
-              </a:defRPr>
-            </a:pPr>
-            <a:r>
-              <a:t>A workplace experience becomes valuable when students know what to notice and how to translate it into learning.</a:t>
-            </a:r>
-          </a:p>
-        </p:txBody>
-      </p:sp>
-      <p:sp>
-        <p:nvSpPr>
-          <p:cNvPr id="5" name="Rectangle 4"/>
-          <p:cNvSpPr/>
-          <p:nvPr/>
-        </p:nvSpPr>
-        <p:spPr>
-          <a:xfrm>
-            <a:off x="0" y="6446520"/>
-            <a:ext cx="12191695" cy="411480"/>
-          </a:xfrm>
-          <a:prstGeom prst="rect">
-            <a:avLst/>
-          </a:prstGeom>
-          <a:solidFill>
-            <a:srgbClr val="062B3F"/>
-          </a:solidFill>
-          <a:ln>
-            <a:noFill/>
-          </a:ln>
-        </p:spPr>
-        <p:style>
-          <a:lnRef idx="1">
-            <a:schemeClr val="accent1"/>
-          </a:lnRef>
-          <a:fillRef idx="3">
-            <a:schemeClr val="accent1"/>
-          </a:fillRef>
-          <a:effectRef idx="2">
-            <a:schemeClr val="accent1"/>
-          </a:effectRef>
-          <a:fontRef idx="minor">
-            <a:schemeClr val="lt1"/>
-          </a:fontRef>
-        </p:style>
-        <p:txBody>
-          <a:bodyPr rtlCol="0" anchor="ctr"/>
-          <a:lstStyle/>
-          <a:p>
-            <a:pPr algn="ctr"/>
-          </a:p>
-        </p:txBody>
-      </p:sp>
-      <p:sp>
-        <p:nvSpPr>
-          <p:cNvPr id="6" name="TextBox 5"/>
-          <p:cNvSpPr txBox="1"/>
-          <p:nvPr/>
-        </p:nvSpPr>
-        <p:spPr>
-          <a:xfrm>
-            <a:off x="457200" y="6510528"/>
-            <a:ext cx="11247120" cy="182880"/>
-          </a:xfrm>
-          <a:prstGeom prst="rect">
-            <a:avLst/>
-          </a:prstGeom>
-          <a:noFill/>
-        </p:spPr>
-        <p:txBody>
-          <a:bodyPr wrap="none">
-            <a:spAutoFit/>
-          </a:bodyPr>
-          <a:lstStyle/>
-          <a:p>
-            <a:pPr algn="ctr">
-              <a:defRPr sz="900">
-                <a:solidFill>
-                  <a:srgbClr val="FFFFFF"/>
-                </a:solidFill>
-              </a:defRPr>
-            </a:pPr>
-            <a:r>
-              <a:t>BUILD6™ · WEEK 11 · © 2026 LINK Lake Norman, LLC · All Rights Reserved</a:t>
-            </a:r>
-          </a:p>
-        </p:txBody>
-      </p:sp>
-    </p:spTree>
-  </p:cSld>
-  <p:clrMapOvr>
-    <a:masterClrMapping/>
-  </p:clrMapOvr>
-</p:sld>
-</file>
-
-<file path=ppt/slides/slide3.xml><?xml version="1.0" encoding="utf-8"?>
-<p:sld xmlns:a="http://schemas.openxmlformats.org/drawingml/2006/main" xmlns:p="http://schemas.openxmlformats.org/presentationml/2006/main" xmlns:r="http://schemas.openxmlformats.org/officeDocument/2006/relationships">
-  <p:cSld>
-    <p:bg>
-      <p:bgPr>
-        <a:solidFill>
-          <a:srgbClr val="F5F9FA"/>
-        </a:solidFill>
-        <a:effectLst/>
-      </p:bgPr>
-    </p:bg>
-    <p:spTree>
-      <p:nvGrpSpPr>
-        <p:cNvPr id="1" name=""/>
-        <p:cNvGrpSpPr/>
-        <p:nvPr/>
-      </p:nvGrpSpPr>
-      <p:grpSpPr/>
-      <p:sp>
-        <p:nvSpPr>
-          <p:cNvPr id="2" name="Rectangle 1"/>
-          <p:cNvSpPr/>
-          <p:nvPr/>
-        </p:nvSpPr>
-        <p:spPr>
-          <a:xfrm>
-            <a:off x="0" y="0"/>
-            <a:ext cx="164592" cy="6858000"/>
-          </a:xfrm>
-          <a:prstGeom prst="rect">
-            <a:avLst/>
-          </a:prstGeom>
-          <a:solidFill>
-            <a:srgbClr val="00A6A6"/>
-          </a:solidFill>
-          <a:ln>
-            <a:noFill/>
-          </a:ln>
-        </p:spPr>
-        <p:style>
-          <a:lnRef idx="1">
-            <a:schemeClr val="accent1"/>
-          </a:lnRef>
-          <a:fillRef idx="3">
-            <a:schemeClr val="accent1"/>
-          </a:fillRef>
-          <a:effectRef idx="2">
-            <a:schemeClr val="accent1"/>
-          </a:effectRef>
-          <a:fontRef idx="minor">
-            <a:schemeClr val="lt1"/>
-          </a:fontRef>
-        </p:style>
-        <p:txBody>
-          <a:bodyPr rtlCol="0" anchor="ctr"/>
-          <a:lstStyle/>
-          <a:p>
-            <a:pPr algn="ctr"/>
-          </a:p>
-        </p:txBody>
-      </p:sp>
-      <p:sp>
-        <p:nvSpPr>
-          <p:cNvPr id="3" name="TextBox 2"/>
-          <p:cNvSpPr txBox="1"/>
-          <p:nvPr/>
-        </p:nvSpPr>
-        <p:spPr>
-          <a:xfrm>
-            <a:off x="594360" y="411480"/>
-            <a:ext cx="10972800" cy="640080"/>
-          </a:xfrm>
-          <a:prstGeom prst="rect">
-            <a:avLst/>
-          </a:prstGeom>
-          <a:noFill/>
-        </p:spPr>
-        <p:txBody>
-          <a:bodyPr wrap="none">
-            <a:spAutoFit/>
-          </a:bodyPr>
-          <a:lstStyle/>
-          <a:p>
-            <a:pPr>
-              <a:defRPr sz="2900" b="1">
-                <a:solidFill>
-                  <a:srgbClr val="062B3F"/>
-                </a:solidFill>
-                <a:latin typeface="Aptos Display"/>
-              </a:defRPr>
-            </a:pPr>
-            <a:r>
-              <a:t>BUILD6 Skills in Focus</a:t>
-            </a:r>
-          </a:p>
-        </p:txBody>
-      </p:sp>
-      <p:sp>
-        <p:nvSpPr>
-          <p:cNvPr id="4" name="TextBox 3"/>
-          <p:cNvSpPr txBox="1"/>
-          <p:nvPr/>
-        </p:nvSpPr>
-        <p:spPr>
-          <a:xfrm>
-            <a:off x="822960" y="1463040"/>
-            <a:ext cx="10561320" cy="4480560"/>
-          </a:xfrm>
-          <a:prstGeom prst="rect">
-            <a:avLst/>
-          </a:prstGeom>
-          <a:noFill/>
-        </p:spPr>
-        <p:txBody>
-          <a:bodyPr wrap="square">
-            <a:spAutoFit/>
-          </a:bodyPr>
-          <a:lstStyle/>
-          <a:p>
-            <a:pPr>
-              <a:spcAft>
-                <a:spcPts val="1400"/>
-              </a:spcAft>
-              <a:defRPr sz="2100">
-                <a:solidFill>
-                  <a:srgbClr val="1B262C"/>
-                </a:solidFill>
-                <a:latin typeface="Aptos"/>
-              </a:defRPr>
-            </a:pPr>
-            <a:r>
-              <a:t>Workplace observation</a:t>
-            </a:r>
-          </a:p>
-          <a:p>
-            <a:pPr>
-              <a:spcAft>
-                <a:spcPts val="1400"/>
-              </a:spcAft>
-              <a:defRPr sz="2100">
-                <a:solidFill>
-                  <a:srgbClr val="1B262C"/>
-                </a:solidFill>
-                <a:latin typeface="Aptos"/>
-              </a:defRPr>
-            </a:pPr>
-            <a:r>
-              <a:t>Professional etiquette</a:t>
-            </a:r>
-          </a:p>
-          <a:p>
-            <a:pPr>
-              <a:spcAft>
-                <a:spcPts val="1400"/>
-              </a:spcAft>
-              <a:defRPr sz="2100">
-                <a:solidFill>
-                  <a:srgbClr val="1B262C"/>
-                </a:solidFill>
-                <a:latin typeface="Aptos"/>
-              </a:defRPr>
-            </a:pPr>
-            <a:r>
-              <a:t>Story recognition</a:t>
-            </a:r>
-          </a:p>
-          <a:p>
-            <a:pPr>
-              <a:spcAft>
-                <a:spcPts val="1400"/>
-              </a:spcAft>
-              <a:defRPr sz="2100">
-                <a:solidFill>
-                  <a:srgbClr val="1B262C"/>
-                </a:solidFill>
-                <a:latin typeface="Aptos"/>
-              </a:defRPr>
-            </a:pPr>
-            <a:r>
-              <a:t>Public-speaking preparation</a:t>
-            </a:r>
-          </a:p>
-        </p:txBody>
-      </p:sp>
-      <p:sp>
-        <p:nvSpPr>
-          <p:cNvPr id="5" name="Rectangle 4"/>
-          <p:cNvSpPr/>
-          <p:nvPr/>
-        </p:nvSpPr>
-        <p:spPr>
-          <a:xfrm>
-            <a:off x="0" y="6446520"/>
-            <a:ext cx="12191695" cy="411480"/>
-          </a:xfrm>
-          <a:prstGeom prst="rect">
-            <a:avLst/>
-          </a:prstGeom>
-          <a:solidFill>
-            <a:srgbClr val="062B3F"/>
-          </a:solidFill>
-          <a:ln>
-            <a:noFill/>
-          </a:ln>
-        </p:spPr>
-        <p:style>
-          <a:lnRef idx="1">
-            <a:schemeClr val="accent1"/>
-          </a:lnRef>
-          <a:fillRef idx="3">
-            <a:schemeClr val="accent1"/>
-          </a:fillRef>
-          <a:effectRef idx="2">
-            <a:schemeClr val="accent1"/>
-          </a:effectRef>
-          <a:fontRef idx="minor">
-            <a:schemeClr val="lt1"/>
-          </a:fontRef>
-        </p:style>
-        <p:txBody>
-          <a:bodyPr rtlCol="0" anchor="ctr"/>
-          <a:lstStyle/>
-          <a:p>
-            <a:pPr algn="ctr"/>
-          </a:p>
-        </p:txBody>
-      </p:sp>
-      <p:sp>
-        <p:nvSpPr>
-          <p:cNvPr id="6" name="TextBox 5"/>
-          <p:cNvSpPr txBox="1"/>
-          <p:nvPr/>
-        </p:nvSpPr>
-        <p:spPr>
-          <a:xfrm>
-            <a:off x="457200" y="6510528"/>
-            <a:ext cx="11247120" cy="182880"/>
-          </a:xfrm>
-          <a:prstGeom prst="rect">
-            <a:avLst/>
-          </a:prstGeom>
-          <a:noFill/>
-        </p:spPr>
-        <p:txBody>
-          <a:bodyPr wrap="none">
-            <a:spAutoFit/>
-          </a:bodyPr>
-          <a:lstStyle/>
-          <a:p>
-            <a:pPr algn="ctr">
-              <a:defRPr sz="900">
-                <a:solidFill>
-                  <a:srgbClr val="FFFFFF"/>
-                </a:solidFill>
-              </a:defRPr>
-            </a:pPr>
-            <a:r>
-              <a:t>BUILD6™ · WEEK 11 · © 2026 LINK Lake Norman, LLC · All Rights Reserved</a:t>
-            </a:r>
-          </a:p>
-        </p:txBody>
-      </p:sp>
-    </p:spTree>
-  </p:cSld>
-  <p:clrMapOvr>
-    <a:masterClrMapping/>
-  </p:clrMapOvr>
-</p:sld>
-</file>
-
-<file path=ppt/slides/slide4.xml><?xml version="1.0" encoding="utf-8"?>
-<p:sld xmlns:a="http://schemas.openxmlformats.org/drawingml/2006/main" xmlns:p="http://schemas.openxmlformats.org/presentationml/2006/main" xmlns:r="http://schemas.openxmlformats.org/officeDocument/2006/relationships">
-  <p:cSld>
-    <p:bg>
-      <p:bgPr>
-        <a:solidFill>
-          <a:srgbClr val="F5F9FA"/>
-        </a:solidFill>
-        <a:effectLst/>
-      </p:bgPr>
-    </p:bg>
-    <p:spTree>
-      <p:nvGrpSpPr>
-        <p:cNvPr id="1" name=""/>
-        <p:cNvGrpSpPr/>
-        <p:nvPr/>
-      </p:nvGrpSpPr>
-      <p:grpSpPr/>
-      <p:sp>
-        <p:nvSpPr>
-          <p:cNvPr id="2" name="Rectangle 1"/>
-          <p:cNvSpPr/>
-          <p:nvPr/>
-        </p:nvSpPr>
-        <p:spPr>
-          <a:xfrm>
-            <a:off x="0" y="0"/>
-            <a:ext cx="164592" cy="6858000"/>
-          </a:xfrm>
-          <a:prstGeom prst="rect">
-            <a:avLst/>
-          </a:prstGeom>
-          <a:solidFill>
-            <a:srgbClr val="00A6A6"/>
-          </a:solidFill>
-          <a:ln>
-            <a:noFill/>
-          </a:ln>
-        </p:spPr>
-        <p:style>
-          <a:lnRef idx="1">
-            <a:schemeClr val="accent1"/>
-          </a:lnRef>
-          <a:fillRef idx="3">
-            <a:schemeClr val="accent1"/>
-          </a:fillRef>
-          <a:effectRef idx="2">
-            <a:schemeClr val="accent1"/>
-          </a:effectRef>
-          <a:fontRef idx="minor">
-            <a:schemeClr val="lt1"/>
-          </a:fontRef>
-        </p:style>
-        <p:txBody>
-          <a:bodyPr rtlCol="0" anchor="ctr"/>
-          <a:lstStyle/>
-          <a:p>
-            <a:pPr algn="ctr"/>
-          </a:p>
-        </p:txBody>
-      </p:sp>
-      <p:sp>
-        <p:nvSpPr>
-          <p:cNvPr id="3" name="TextBox 2"/>
-          <p:cNvSpPr txBox="1"/>
-          <p:nvPr/>
-        </p:nvSpPr>
-        <p:spPr>
-          <a:xfrm>
-            <a:off x="594360" y="411480"/>
-            <a:ext cx="10972800" cy="640080"/>
-          </a:xfrm>
-          <a:prstGeom prst="rect">
-            <a:avLst/>
-          </a:prstGeom>
-          <a:noFill/>
-        </p:spPr>
-        <p:txBody>
-          <a:bodyPr wrap="none">
-            <a:spAutoFit/>
-          </a:bodyPr>
-          <a:lstStyle/>
-          <a:p>
-            <a:pPr>
-              <a:defRPr sz="2900" b="1">
-                <a:solidFill>
-                  <a:srgbClr val="062B3F"/>
-                </a:solidFill>
-                <a:latin typeface="Aptos Display"/>
-              </a:defRPr>
-            </a:pPr>
-            <a:r>
-              <a:t>Real-World Connection</a:t>
-            </a:r>
-          </a:p>
-        </p:txBody>
-      </p:sp>
-      <p:sp>
-        <p:nvSpPr>
-          <p:cNvPr id="4" name="TextBox 3"/>
-          <p:cNvSpPr txBox="1"/>
-          <p:nvPr/>
-        </p:nvSpPr>
-        <p:spPr>
-          <a:xfrm>
-            <a:off x="822960" y="1463040"/>
-            <a:ext cx="10561320" cy="4480560"/>
-          </a:xfrm>
-          <a:prstGeom prst="rect">
-            <a:avLst/>
-          </a:prstGeom>
-          <a:noFill/>
-        </p:spPr>
-        <p:txBody>
-          <a:bodyPr wrap="square">
-            <a:spAutoFit/>
-          </a:bodyPr>
-          <a:lstStyle/>
-          <a:p>
-            <a:pPr>
-              <a:spcAft>
-                <a:spcPts val="1400"/>
-              </a:spcAft>
-              <a:defRPr sz="2100">
-                <a:solidFill>
-                  <a:srgbClr val="1B262C"/>
-                </a:solidFill>
-                <a:latin typeface="Aptos"/>
-              </a:defRPr>
-            </a:pPr>
-            <a:r>
-              <a:t>Champion Tire &amp; Wheel</a:t>
-            </a:r>
-          </a:p>
-          <a:p>
-            <a:pPr>
-              <a:spcAft>
-                <a:spcPts val="1400"/>
-              </a:spcAft>
-              <a:defRPr sz="2100">
-                <a:solidFill>
-                  <a:srgbClr val="1B262C"/>
-                </a:solidFill>
-                <a:latin typeface="Aptos"/>
-              </a:defRPr>
-            </a:pPr>
-            <a:r>
-              <a:t>1:00–2:00 PM</a:t>
-            </a:r>
-          </a:p>
-          <a:p>
-            <a:pPr>
-              <a:spcAft>
-                <a:spcPts val="1400"/>
-              </a:spcAft>
-              <a:defRPr sz="2100">
-                <a:solidFill>
-                  <a:srgbClr val="1B262C"/>
-                </a:solidFill>
-                <a:latin typeface="Aptos"/>
-              </a:defRPr>
-            </a:pPr>
-            <a:r>
-              <a:t>Closed-toe shoes required</a:t>
-            </a:r>
-          </a:p>
-        </p:txBody>
-      </p:sp>
-      <p:sp>
-        <p:nvSpPr>
-          <p:cNvPr id="5" name="Rectangle 4"/>
-          <p:cNvSpPr/>
-          <p:nvPr/>
-        </p:nvSpPr>
-        <p:spPr>
-          <a:xfrm>
-            <a:off x="0" y="6446520"/>
-            <a:ext cx="12191695" cy="411480"/>
-          </a:xfrm>
-          <a:prstGeom prst="rect">
-            <a:avLst/>
-          </a:prstGeom>
-          <a:solidFill>
-            <a:srgbClr val="062B3F"/>
-          </a:solidFill>
-          <a:ln>
-            <a:noFill/>
-          </a:ln>
-        </p:spPr>
-        <p:style>
-          <a:lnRef idx="1">
-            <a:schemeClr val="accent1"/>
-          </a:lnRef>
-          <a:fillRef idx="3">
-            <a:schemeClr val="accent1"/>
-          </a:fillRef>
-          <a:effectRef idx="2">
-            <a:schemeClr val="accent1"/>
-          </a:effectRef>
-          <a:fontRef idx="minor">
-            <a:schemeClr val="lt1"/>
-          </a:fontRef>
-        </p:style>
-        <p:txBody>
-          <a:bodyPr rtlCol="0" anchor="ctr"/>
-          <a:lstStyle/>
-          <a:p>
-            <a:pPr algn="ctr"/>
-          </a:p>
-        </p:txBody>
-      </p:sp>
-      <p:sp>
-        <p:nvSpPr>
-          <p:cNvPr id="6" name="TextBox 5"/>
-          <p:cNvSpPr txBox="1"/>
-          <p:nvPr/>
-        </p:nvSpPr>
-        <p:spPr>
-          <a:xfrm>
-            <a:off x="457200" y="6510528"/>
-            <a:ext cx="11247120" cy="182880"/>
-          </a:xfrm>
-          <a:prstGeom prst="rect">
-            <a:avLst/>
-          </a:prstGeom>
-          <a:noFill/>
-        </p:spPr>
-        <p:txBody>
-          <a:bodyPr wrap="none">
-            <a:spAutoFit/>
-          </a:bodyPr>
-          <a:lstStyle/>
-          <a:p>
-            <a:pPr algn="ctr">
-              <a:defRPr sz="900">
-                <a:solidFill>
-                  <a:srgbClr val="FFFFFF"/>
-                </a:solidFill>
-              </a:defRPr>
-            </a:pPr>
-            <a:r>
-              <a:t>BUILD6™ · WEEK 11 · © 2026 LINK Lake Norman, LLC · All Rights Reserved</a:t>
-            </a:r>
-          </a:p>
-        </p:txBody>
-      </p:sp>
-    </p:spTree>
-  </p:cSld>
-  <p:clrMapOvr>
-    <a:masterClrMapping/>
-  </p:clrMapOvr>
-</p:sld>
-</file>
-
-<file path=ppt/slides/slide5.xml><?xml version="1.0" encoding="utf-8"?>
-<p:sld xmlns:a="http://schemas.openxmlformats.org/drawingml/2006/main" xmlns:p="http://schemas.openxmlformats.org/presentationml/2006/main" xmlns:r="http://schemas.openxmlformats.org/officeDocument/2006/relationships">
-  <p:cSld>
-    <p:bg>
-      <p:bgPr>
-        <a:solidFill>
-          <a:srgbClr val="F5F9FA"/>
-        </a:solidFill>
-        <a:effectLst/>
-      </p:bgPr>
-    </p:bg>
-    <p:spTree>
-      <p:nvGrpSpPr>
-        <p:cNvPr id="1" name=""/>
-        <p:cNvGrpSpPr/>
-        <p:nvPr/>
-      </p:nvGrpSpPr>
-      <p:grpSpPr/>
-      <p:sp>
-        <p:nvSpPr>
-          <p:cNvPr id="2" name="Rectangle 1"/>
-          <p:cNvSpPr/>
-          <p:nvPr/>
-        </p:nvSpPr>
-        <p:spPr>
-          <a:xfrm>
-            <a:off x="0" y="0"/>
-            <a:ext cx="164592" cy="6858000"/>
-          </a:xfrm>
-          <a:prstGeom prst="rect">
-            <a:avLst/>
-          </a:prstGeom>
-          <a:solidFill>
-            <a:srgbClr val="00A6A6"/>
-          </a:solidFill>
-          <a:ln>
-            <a:noFill/>
-          </a:ln>
-        </p:spPr>
-        <p:style>
-          <a:lnRef idx="1">
-            <a:schemeClr val="accent1"/>
-          </a:lnRef>
-          <a:fillRef idx="3">
-            <a:schemeClr val="accent1"/>
-          </a:fillRef>
-          <a:effectRef idx="2">
-            <a:schemeClr val="accent1"/>
-          </a:effectRef>
-          <a:fontRef idx="minor">
-            <a:schemeClr val="lt1"/>
-          </a:fontRef>
-        </p:style>
-        <p:txBody>
-          <a:bodyPr rtlCol="0" anchor="ctr"/>
-          <a:lstStyle/>
-          <a:p>
-            <a:pPr algn="ctr"/>
-          </a:p>
-        </p:txBody>
-      </p:sp>
-      <p:sp>
-        <p:nvSpPr>
-          <p:cNvPr id="3" name="TextBox 2"/>
-          <p:cNvSpPr txBox="1"/>
-          <p:nvPr/>
-        </p:nvSpPr>
-        <p:spPr>
-          <a:xfrm>
-            <a:off x="594360" y="411480"/>
-            <a:ext cx="10972800" cy="640080"/>
-          </a:xfrm>
-          <a:prstGeom prst="rect">
-            <a:avLst/>
-          </a:prstGeom>
-          <a:noFill/>
-        </p:spPr>
-        <p:txBody>
-          <a:bodyPr wrap="none">
-            <a:spAutoFit/>
-          </a:bodyPr>
-          <a:lstStyle/>
-          <a:p>
-            <a:pPr>
-              <a:defRPr sz="2900" b="1">
-                <a:solidFill>
-                  <a:srgbClr val="062B3F"/>
-                </a:solidFill>
-                <a:latin typeface="Aptos Display"/>
-              </a:defRPr>
-            </a:pPr>
-            <a:r>
-              <a:t>Before: Prepare With Purpose</a:t>
-            </a:r>
-          </a:p>
-        </p:txBody>
-      </p:sp>
-      <p:sp>
-        <p:nvSpPr>
-          <p:cNvPr id="4" name="TextBox 3"/>
-          <p:cNvSpPr txBox="1"/>
-          <p:nvPr/>
-        </p:nvSpPr>
-        <p:spPr>
-          <a:xfrm>
-            <a:off x="822960" y="1463040"/>
-            <a:ext cx="10561320" cy="4480560"/>
-          </a:xfrm>
-          <a:prstGeom prst="rect">
-            <a:avLst/>
-          </a:prstGeom>
-          <a:noFill/>
-        </p:spPr>
-        <p:txBody>
-          <a:bodyPr wrap="square">
-            <a:spAutoFit/>
-          </a:bodyPr>
-          <a:lstStyle/>
-          <a:p>
-            <a:pPr>
-              <a:spcAft>
-                <a:spcPts val="1400"/>
-              </a:spcAft>
-              <a:defRPr sz="2100">
-                <a:solidFill>
-                  <a:srgbClr val="1B262C"/>
-                </a:solidFill>
-                <a:latin typeface="Aptos"/>
-              </a:defRPr>
-            </a:pPr>
-            <a:r>
-              <a:t>What do I already know?</a:t>
-            </a:r>
-          </a:p>
-          <a:p>
-            <a:pPr>
-              <a:spcAft>
-                <a:spcPts val="1400"/>
-              </a:spcAft>
-              <a:defRPr sz="2100">
-                <a:solidFill>
-                  <a:srgbClr val="1B262C"/>
-                </a:solidFill>
-                <a:latin typeface="Aptos"/>
-              </a:defRPr>
-            </a:pPr>
-            <a:r>
-              <a:t>What assumptions am I bringing?</a:t>
-            </a:r>
-          </a:p>
-          <a:p>
-            <a:pPr>
-              <a:spcAft>
-                <a:spcPts val="1400"/>
-              </a:spcAft>
-              <a:defRPr sz="2100">
-                <a:solidFill>
-                  <a:srgbClr val="1B262C"/>
-                </a:solidFill>
-                <a:latin typeface="Aptos"/>
-              </a:defRPr>
-            </a:pPr>
-            <a:r>
-              <a:t>What should I pay attention to?</a:t>
-            </a:r>
-          </a:p>
-          <a:p>
-            <a:pPr>
-              <a:spcAft>
-                <a:spcPts val="1400"/>
-              </a:spcAft>
-              <a:defRPr sz="2100">
-                <a:solidFill>
-                  <a:srgbClr val="1B262C"/>
-                </a:solidFill>
-                <a:latin typeface="Aptos"/>
-              </a:defRPr>
-            </a:pPr>
-            <a:r>
-              <a:t>What question is worth asking?</a:t>
-            </a:r>
-          </a:p>
-        </p:txBody>
-      </p:sp>
-      <p:sp>
-        <p:nvSpPr>
-          <p:cNvPr id="5" name="Rectangle 4"/>
-          <p:cNvSpPr/>
-          <p:nvPr/>
-        </p:nvSpPr>
-        <p:spPr>
-          <a:xfrm>
-            <a:off x="0" y="6446520"/>
-            <a:ext cx="12191695" cy="411480"/>
-          </a:xfrm>
-          <a:prstGeom prst="rect">
-            <a:avLst/>
-          </a:prstGeom>
-          <a:solidFill>
-            <a:srgbClr val="062B3F"/>
-          </a:solidFill>
-          <a:ln>
-            <a:noFill/>
-          </a:ln>
-        </p:spPr>
-        <p:style>
-          <a:lnRef idx="1">
-            <a:schemeClr val="accent1"/>
-          </a:lnRef>
-          <a:fillRef idx="3">
-            <a:schemeClr val="accent1"/>
-          </a:fillRef>
-          <a:effectRef idx="2">
-            <a:schemeClr val="accent1"/>
-          </a:effectRef>
-          <a:fontRef idx="minor">
-            <a:schemeClr val="lt1"/>
-          </a:fontRef>
-        </p:style>
-        <p:txBody>
-          <a:bodyPr rtlCol="0" anchor="ctr"/>
-          <a:lstStyle/>
-          <a:p>
-            <a:pPr algn="ctr"/>
-          </a:p>
-        </p:txBody>
-      </p:sp>
-      <p:sp>
-        <p:nvSpPr>
-          <p:cNvPr id="6" name="TextBox 5"/>
-          <p:cNvSpPr txBox="1"/>
-          <p:nvPr/>
-        </p:nvSpPr>
-        <p:spPr>
-          <a:xfrm>
-            <a:off x="457200" y="6510528"/>
-            <a:ext cx="11247120" cy="182880"/>
-          </a:xfrm>
-          <a:prstGeom prst="rect">
-            <a:avLst/>
-          </a:prstGeom>
-          <a:noFill/>
-        </p:spPr>
-        <p:txBody>
-          <a:bodyPr wrap="none">
-            <a:spAutoFit/>
-          </a:bodyPr>
-          <a:lstStyle/>
-          <a:p>
-            <a:pPr algn="ctr">
-              <a:defRPr sz="900">
-                <a:solidFill>
-                  <a:srgbClr val="FFFFFF"/>
-                </a:solidFill>
-              </a:defRPr>
-            </a:pPr>
-            <a:r>
-              <a:t>BUILD6™ · WEEK 11 · © 2026 LINK Lake Norman, LLC · All Rights Reserved</a:t>
-            </a:r>
-          </a:p>
-        </p:txBody>
-      </p:sp>
-    </p:spTree>
-  </p:cSld>
-  <p:clrMapOvr>
-    <a:masterClrMapping/>
-  </p:clrMapOvr>
-</p:sld>
-</file>
-
-<file path=ppt/slides/slide6.xml><?xml version="1.0" encoding="utf-8"?>
-<p:sld xmlns:a="http://schemas.openxmlformats.org/drawingml/2006/main" xmlns:p="http://schemas.openxmlformats.org/presentationml/2006/main" xmlns:r="http://schemas.openxmlformats.org/officeDocument/2006/relationships">
-  <p:cSld>
-    <p:bg>
-      <p:bgPr>
-        <a:solidFill>
-          <a:srgbClr val="F5F9FA"/>
-        </a:solidFill>
-        <a:effectLst/>
-      </p:bgPr>
-    </p:bg>
-    <p:spTree>
-      <p:nvGrpSpPr>
-        <p:cNvPr id="1" name=""/>
-        <p:cNvGrpSpPr/>
-        <p:nvPr/>
-      </p:nvGrpSpPr>
-      <p:grpSpPr/>
-      <p:sp>
-        <p:nvSpPr>
-          <p:cNvPr id="2" name="Rectangle 1"/>
-          <p:cNvSpPr/>
-          <p:nvPr/>
-        </p:nvSpPr>
-        <p:spPr>
-          <a:xfrm>
-            <a:off x="0" y="0"/>
-            <a:ext cx="164592" cy="6858000"/>
-          </a:xfrm>
-          <a:prstGeom prst="rect">
-            <a:avLst/>
-          </a:prstGeom>
-          <a:solidFill>
-            <a:srgbClr val="00A6A6"/>
-          </a:solidFill>
-          <a:ln>
-            <a:noFill/>
-          </a:ln>
-        </p:spPr>
-        <p:style>
-          <a:lnRef idx="1">
-            <a:schemeClr val="accent1"/>
-          </a:lnRef>
-          <a:fillRef idx="3">
-            <a:schemeClr val="accent1"/>
-          </a:fillRef>
-          <a:effectRef idx="2">
-            <a:schemeClr val="accent1"/>
-          </a:effectRef>
-          <a:fontRef idx="minor">
-            <a:schemeClr val="lt1"/>
-          </a:fontRef>
-        </p:style>
-        <p:txBody>
-          <a:bodyPr rtlCol="0" anchor="ctr"/>
-          <a:lstStyle/>
-          <a:p>
-            <a:pPr algn="ctr"/>
-          </a:p>
-        </p:txBody>
-      </p:sp>
-      <p:sp>
-        <p:nvSpPr>
-          <p:cNvPr id="3" name="TextBox 2"/>
-          <p:cNvSpPr txBox="1"/>
-          <p:nvPr/>
-        </p:nvSpPr>
-        <p:spPr>
-          <a:xfrm>
-            <a:off x="594360" y="411480"/>
-            <a:ext cx="10972800" cy="640080"/>
-          </a:xfrm>
-          <a:prstGeom prst="rect">
-            <a:avLst/>
-          </a:prstGeom>
-          <a:noFill/>
-        </p:spPr>
-        <p:txBody>
-          <a:bodyPr wrap="none">
-            <a:spAutoFit/>
-          </a:bodyPr>
-          <a:lstStyle/>
-          <a:p>
-            <a:pPr>
-              <a:defRPr sz="2900" b="1">
-                <a:solidFill>
-                  <a:srgbClr val="062B3F"/>
-                </a:solidFill>
-                <a:latin typeface="Aptos Display"/>
-              </a:defRPr>
-            </a:pPr>
-            <a:r>
-              <a:t>Activity / Challenge</a:t>
-            </a:r>
-          </a:p>
-        </p:txBody>
-      </p:sp>
-      <p:sp>
-        <p:nvSpPr>
-          <p:cNvPr id="4" name="TextBox 3"/>
-          <p:cNvSpPr txBox="1"/>
-          <p:nvPr/>
-        </p:nvSpPr>
-        <p:spPr>
-          <a:xfrm>
-            <a:off x="822960" y="1463040"/>
-            <a:ext cx="10561320" cy="4480560"/>
-          </a:xfrm>
-          <a:prstGeom prst="rect">
-            <a:avLst/>
-          </a:prstGeom>
-          <a:noFill/>
-        </p:spPr>
-        <p:txBody>
-          <a:bodyPr wrap="square">
-            <a:spAutoFit/>
-          </a:bodyPr>
-          <a:lstStyle/>
-          <a:p>
-            <a:pPr>
-              <a:spcAft>
-                <a:spcPts val="1400"/>
-              </a:spcAft>
-              <a:defRPr sz="2100">
-                <a:solidFill>
-                  <a:srgbClr val="1B262C"/>
-                </a:solidFill>
-                <a:latin typeface="Aptos"/>
-              </a:defRPr>
-            </a:pPr>
-            <a:r>
-              <a:t>Capture one example of teamwork.</a:t>
-            </a:r>
-          </a:p>
-          <a:p>
-            <a:pPr>
-              <a:spcAft>
-                <a:spcPts val="1400"/>
-              </a:spcAft>
-              <a:defRPr sz="2100">
-                <a:solidFill>
-                  <a:srgbClr val="1B262C"/>
-                </a:solidFill>
-                <a:latin typeface="Aptos"/>
-              </a:defRPr>
-            </a:pPr>
-            <a:r>
-              <a:t>Capture one example of problem solving.</a:t>
-            </a:r>
-          </a:p>
-          <a:p>
-            <a:pPr>
-              <a:spcAft>
-                <a:spcPts val="1400"/>
-              </a:spcAft>
-              <a:defRPr sz="2100">
-                <a:solidFill>
-                  <a:srgbClr val="1B262C"/>
-                </a:solidFill>
-                <a:latin typeface="Aptos"/>
-              </a:defRPr>
-            </a:pPr>
-            <a:r>
-              <a:t>Turn one tour observation into a story worth telling.</a:t>
-            </a:r>
-          </a:p>
-        </p:txBody>
-      </p:sp>
-      <p:sp>
-        <p:nvSpPr>
-          <p:cNvPr id="5" name="Rectangle 4"/>
-          <p:cNvSpPr/>
-          <p:nvPr/>
-        </p:nvSpPr>
-        <p:spPr>
-          <a:xfrm>
-            <a:off x="0" y="6446520"/>
-            <a:ext cx="12191695" cy="411480"/>
-          </a:xfrm>
-          <a:prstGeom prst="rect">
-            <a:avLst/>
-          </a:prstGeom>
-          <a:solidFill>
-            <a:srgbClr val="062B3F"/>
-          </a:solidFill>
-          <a:ln>
-            <a:noFill/>
-          </a:ln>
-        </p:spPr>
-        <p:style>
-          <a:lnRef idx="1">
-            <a:schemeClr val="accent1"/>
-          </a:lnRef>
-          <a:fillRef idx="3">
-            <a:schemeClr val="accent1"/>
-          </a:fillRef>
-          <a:effectRef idx="2">
-            <a:schemeClr val="accent1"/>
-          </a:effectRef>
-          <a:fontRef idx="minor">
-            <a:schemeClr val="lt1"/>
-          </a:fontRef>
-        </p:style>
-        <p:txBody>
-          <a:bodyPr rtlCol="0" anchor="ctr"/>
-          <a:lstStyle/>
-          <a:p>
-            <a:pPr algn="ctr"/>
-          </a:p>
-        </p:txBody>
-      </p:sp>
-      <p:sp>
-        <p:nvSpPr>
-          <p:cNvPr id="6" name="TextBox 5"/>
-          <p:cNvSpPr txBox="1"/>
-          <p:nvPr/>
-        </p:nvSpPr>
-        <p:spPr>
-          <a:xfrm>
-            <a:off x="457200" y="6510528"/>
-            <a:ext cx="11247120" cy="182880"/>
-          </a:xfrm>
-          <a:prstGeom prst="rect">
-            <a:avLst/>
-          </a:prstGeom>
-          <a:noFill/>
-        </p:spPr>
-        <p:txBody>
-          <a:bodyPr wrap="none">
-            <a:spAutoFit/>
-          </a:bodyPr>
-          <a:lstStyle/>
-          <a:p>
-            <a:pPr algn="ctr">
-              <a:defRPr sz="900">
-                <a:solidFill>
-                  <a:srgbClr val="FFFFFF"/>
-                </a:solidFill>
-              </a:defRPr>
-            </a:pPr>
-            <a:r>
-              <a:t>BUILD6™ · WEEK 11 · © 2026 LINK Lake Norman, LLC · All Rights Reserved</a:t>
-            </a:r>
-          </a:p>
-        </p:txBody>
-      </p:sp>
-    </p:spTree>
-  </p:cSld>
-  <p:clrMapOvr>
-    <a:masterClrMapping/>
-  </p:clrMapOvr>
-</p:sld>
-</file>
-
-<file path=ppt/slides/slide7.xml><?xml version="1.0" encoding="utf-8"?>
-<p:sld xmlns:a="http://schemas.openxmlformats.org/drawingml/2006/main" xmlns:p="http://schemas.openxmlformats.org/presentationml/2006/main" xmlns:r="http://schemas.openxmlformats.org/officeDocument/2006/relationships">
-  <p:cSld>
-    <p:bg>
-      <p:bgPr>
-        <a:solidFill>
-          <a:srgbClr val="F5F9FA"/>
-        </a:solidFill>
-        <a:effectLst/>
-      </p:bgPr>
-    </p:bg>
-    <p:spTree>
-      <p:nvGrpSpPr>
-        <p:cNvPr id="1" name=""/>
-        <p:cNvGrpSpPr/>
-        <p:nvPr/>
-      </p:nvGrpSpPr>
-      <p:grpSpPr/>
-      <p:sp>
-        <p:nvSpPr>
-          <p:cNvPr id="2" name="Rectangle 1"/>
-          <p:cNvSpPr/>
-          <p:nvPr/>
-        </p:nvSpPr>
-        <p:spPr>
-          <a:xfrm>
-            <a:off x="0" y="0"/>
-            <a:ext cx="164592" cy="6858000"/>
-          </a:xfrm>
-          <a:prstGeom prst="rect">
-            <a:avLst/>
-          </a:prstGeom>
-          <a:solidFill>
-            <a:srgbClr val="00A6A6"/>
-          </a:solidFill>
-          <a:ln>
-            <a:noFill/>
-          </a:ln>
-        </p:spPr>
-        <p:style>
-          <a:lnRef idx="1">
-            <a:schemeClr val="accent1"/>
-          </a:lnRef>
-          <a:fillRef idx="3">
-            <a:schemeClr val="accent1"/>
-          </a:fillRef>
-          <a:effectRef idx="2">
-            <a:schemeClr val="accent1"/>
-          </a:effectRef>
-          <a:fontRef idx="minor">
-            <a:schemeClr val="lt1"/>
-          </a:fontRef>
-        </p:style>
-        <p:txBody>
-          <a:bodyPr rtlCol="0" anchor="ctr"/>
-          <a:lstStyle/>
-          <a:p>
-            <a:pPr algn="ctr"/>
-          </a:p>
-        </p:txBody>
-      </p:sp>
-      <p:sp>
-        <p:nvSpPr>
-          <p:cNvPr id="3" name="TextBox 2"/>
-          <p:cNvSpPr txBox="1"/>
-          <p:nvPr/>
-        </p:nvSpPr>
-        <p:spPr>
-          <a:xfrm>
-            <a:off x="594360" y="411480"/>
-            <a:ext cx="10972800" cy="640080"/>
-          </a:xfrm>
-          <a:prstGeom prst="rect">
-            <a:avLst/>
-          </a:prstGeom>
-          <a:noFill/>
-        </p:spPr>
-        <p:txBody>
-          <a:bodyPr wrap="none">
-            <a:spAutoFit/>
-          </a:bodyPr>
-          <a:lstStyle/>
-          <a:p>
-            <a:pPr>
-              <a:defRPr sz="2900" b="1">
-                <a:solidFill>
-                  <a:srgbClr val="062B3F"/>
-                </a:solidFill>
-                <a:latin typeface="Aptos Display"/>
-              </a:defRPr>
-            </a:pPr>
-            <a:r>
-              <a:t>Professional Questions</a:t>
-            </a:r>
-          </a:p>
-        </p:txBody>
-      </p:sp>
-      <p:sp>
-        <p:nvSpPr>
-          <p:cNvPr id="4" name="TextBox 3"/>
-          <p:cNvSpPr txBox="1"/>
-          <p:nvPr/>
-        </p:nvSpPr>
-        <p:spPr>
-          <a:xfrm>
-            <a:off x="822960" y="1463040"/>
-            <a:ext cx="10561320" cy="4480560"/>
-          </a:xfrm>
-          <a:prstGeom prst="rect">
-            <a:avLst/>
-          </a:prstGeom>
-          <a:noFill/>
-        </p:spPr>
-        <p:txBody>
-          <a:bodyPr wrap="square">
-            <a:spAutoFit/>
-          </a:bodyPr>
-          <a:lstStyle/>
-          <a:p>
-            <a:pPr>
-              <a:spcAft>
-                <a:spcPts val="1400"/>
-              </a:spcAft>
-              <a:defRPr sz="2100">
-                <a:solidFill>
-                  <a:srgbClr val="1B262C"/>
-                </a:solidFill>
-                <a:latin typeface="Aptos"/>
-              </a:defRPr>
-            </a:pPr>
-            <a:r>
-              <a:t>What does professionalism look like in this environment?</a:t>
-            </a:r>
-          </a:p>
-          <a:p>
-            <a:pPr>
-              <a:spcAft>
-                <a:spcPts val="1400"/>
-              </a:spcAft>
-              <a:defRPr sz="2100">
-                <a:solidFill>
-                  <a:srgbClr val="1B262C"/>
-                </a:solidFill>
-                <a:latin typeface="Aptos"/>
-              </a:defRPr>
-            </a:pPr>
-            <a:r>
-              <a:t>What happens when something goes wrong?</a:t>
-            </a:r>
-          </a:p>
-          <a:p>
-            <a:pPr>
-              <a:spcAft>
-                <a:spcPts val="1400"/>
-              </a:spcAft>
-              <a:defRPr sz="2100">
-                <a:solidFill>
-                  <a:srgbClr val="1B262C"/>
-                </a:solidFill>
-                <a:latin typeface="Aptos"/>
-              </a:defRPr>
-            </a:pPr>
-            <a:r>
-              <a:t>Which skills transfer beyond this industry?</a:t>
-            </a:r>
-          </a:p>
-        </p:txBody>
-      </p:sp>
-      <p:sp>
-        <p:nvSpPr>
-          <p:cNvPr id="5" name="Rectangle 4"/>
-          <p:cNvSpPr/>
-          <p:nvPr/>
-        </p:nvSpPr>
-        <p:spPr>
-          <a:xfrm>
-            <a:off x="0" y="6446520"/>
-            <a:ext cx="12191695" cy="411480"/>
-          </a:xfrm>
-          <a:prstGeom prst="rect">
-            <a:avLst/>
-          </a:prstGeom>
-          <a:solidFill>
-            <a:srgbClr val="062B3F"/>
-          </a:solidFill>
-          <a:ln>
-            <a:noFill/>
-          </a:ln>
-        </p:spPr>
-        <p:style>
-          <a:lnRef idx="1">
-            <a:schemeClr val="accent1"/>
-          </a:lnRef>
-          <a:fillRef idx="3">
-            <a:schemeClr val="accent1"/>
-          </a:fillRef>
-          <a:effectRef idx="2">
-            <a:schemeClr val="accent1"/>
-          </a:effectRef>
-          <a:fontRef idx="minor">
-            <a:schemeClr val="lt1"/>
-          </a:fontRef>
-        </p:style>
-        <p:txBody>
-          <a:bodyPr rtlCol="0" anchor="ctr"/>
-          <a:lstStyle/>
-          <a:p>
-            <a:pPr algn="ctr"/>
-          </a:p>
-        </p:txBody>
-      </p:sp>
-      <p:sp>
-        <p:nvSpPr>
-          <p:cNvPr id="6" name="TextBox 5"/>
-          <p:cNvSpPr txBox="1"/>
-          <p:nvPr/>
-        </p:nvSpPr>
-        <p:spPr>
-          <a:xfrm>
-            <a:off x="457200" y="6510528"/>
-            <a:ext cx="11247120" cy="182880"/>
-          </a:xfrm>
-          <a:prstGeom prst="rect">
-            <a:avLst/>
-          </a:prstGeom>
-          <a:noFill/>
-        </p:spPr>
-        <p:txBody>
-          <a:bodyPr wrap="none">
-            <a:spAutoFit/>
-          </a:bodyPr>
-          <a:lstStyle/>
-          <a:p>
-            <a:pPr algn="ctr">
-              <a:defRPr sz="900">
-                <a:solidFill>
-                  <a:srgbClr val="FFFFFF"/>
-                </a:solidFill>
-              </a:defRPr>
-            </a:pPr>
-            <a:r>
-              <a:t>BUILD6™ · WEEK 11 · © 2026 LINK Lake Norman, LLC · All Rights Reserved</a:t>
-            </a:r>
-          </a:p>
-        </p:txBody>
-      </p:sp>
-    </p:spTree>
-  </p:cSld>
-  <p:clrMapOvr>
-    <a:masterClrMapping/>
-  </p:clrMapOvr>
-</p:sld>
-</file>
-
-<file path=ppt/slides/slide8.xml><?xml version="1.0" encoding="utf-8"?>
-<p:sld xmlns:a="http://schemas.openxmlformats.org/drawingml/2006/main" xmlns:p="http://schemas.openxmlformats.org/presentationml/2006/main" xmlns:r="http://schemas.openxmlformats.org/officeDocument/2006/relationships">
-  <p:cSld>
-    <p:bg>
-      <p:bgPr>
-        <a:solidFill>
-          <a:srgbClr val="F5F9FA"/>
-        </a:solidFill>
-        <a:effectLst/>
-      </p:bgPr>
-    </p:bg>
-    <p:spTree>
-      <p:nvGrpSpPr>
-        <p:cNvPr id="1" name=""/>
-        <p:cNvGrpSpPr/>
-        <p:nvPr/>
-      </p:nvGrpSpPr>
-      <p:grpSpPr/>
-      <p:sp>
-        <p:nvSpPr>
-          <p:cNvPr id="2" name="Rectangle 1"/>
-          <p:cNvSpPr/>
-          <p:nvPr/>
-        </p:nvSpPr>
-        <p:spPr>
-          <a:xfrm>
-            <a:off x="0" y="0"/>
-            <a:ext cx="164592" cy="6858000"/>
-          </a:xfrm>
-          <a:prstGeom prst="rect">
-            <a:avLst/>
-          </a:prstGeom>
-          <a:solidFill>
-            <a:srgbClr val="00A6A6"/>
-          </a:solidFill>
-          <a:ln>
-            <a:noFill/>
-          </a:ln>
-        </p:spPr>
-        <p:style>
-          <a:lnRef idx="1">
-            <a:schemeClr val="accent1"/>
-          </a:lnRef>
-          <a:fillRef idx="3">
-            <a:schemeClr val="accent1"/>
-          </a:fillRef>
-          <a:effectRef idx="2">
-            <a:schemeClr val="accent1"/>
-          </a:effectRef>
-          <a:fontRef idx="minor">
-            <a:schemeClr val="lt1"/>
-          </a:fontRef>
-        </p:style>
-        <p:txBody>
-          <a:bodyPr rtlCol="0" anchor="ctr"/>
-          <a:lstStyle/>
-          <a:p>
-            <a:pPr algn="ctr"/>
-          </a:p>
-        </p:txBody>
-      </p:sp>
-      <p:sp>
-        <p:nvSpPr>
-          <p:cNvPr id="3" name="TextBox 2"/>
-          <p:cNvSpPr txBox="1"/>
-          <p:nvPr/>
-        </p:nvSpPr>
-        <p:spPr>
-          <a:xfrm>
-            <a:off x="594360" y="411480"/>
-            <a:ext cx="10972800" cy="640080"/>
-          </a:xfrm>
-          <a:prstGeom prst="rect">
-            <a:avLst/>
-          </a:prstGeom>
-          <a:noFill/>
-        </p:spPr>
-        <p:txBody>
-          <a:bodyPr wrap="none">
-            <a:spAutoFit/>
-          </a:bodyPr>
-          <a:lstStyle/>
-          <a:p>
-            <a:pPr>
-              <a:defRPr sz="2900" b="1">
-                <a:solidFill>
-                  <a:srgbClr val="062B3F"/>
-                </a:solidFill>
-                <a:latin typeface="Aptos Display"/>
-              </a:defRPr>
-            </a:pPr>
-            <a:r>
-              <a:t>During: Capture Evidence</a:t>
-            </a:r>
-          </a:p>
-        </p:txBody>
-      </p:sp>
-      <p:sp>
-        <p:nvSpPr>
-          <p:cNvPr id="4" name="TextBox 3"/>
-          <p:cNvSpPr txBox="1"/>
-          <p:nvPr/>
-        </p:nvSpPr>
-        <p:spPr>
-          <a:xfrm>
-            <a:off x="822960" y="1463040"/>
-            <a:ext cx="10561320" cy="4480560"/>
-          </a:xfrm>
-          <a:prstGeom prst="rect">
-            <a:avLst/>
-          </a:prstGeom>
-          <a:noFill/>
-        </p:spPr>
-        <p:txBody>
-          <a:bodyPr wrap="square">
-            <a:spAutoFit/>
-          </a:bodyPr>
-          <a:lstStyle/>
-          <a:p>
-            <a:pPr>
-              <a:spcAft>
-                <a:spcPts val="1400"/>
-              </a:spcAft>
-              <a:defRPr sz="2100">
-                <a:solidFill>
-                  <a:srgbClr val="1B262C"/>
-                </a:solidFill>
-                <a:latin typeface="Aptos"/>
-              </a:defRPr>
-            </a:pPr>
-            <a:r>
-              <a:t>Write down something specific—not merely 'it was interesting.'</a:t>
-            </a:r>
-          </a:p>
-          <a:p>
-            <a:pPr>
-              <a:spcAft>
-                <a:spcPts val="1400"/>
-              </a:spcAft>
-              <a:defRPr sz="2100">
-                <a:solidFill>
-                  <a:srgbClr val="1B262C"/>
-                </a:solidFill>
-                <a:latin typeface="Aptos"/>
-              </a:defRPr>
-            </a:pPr>
-            <a:r>
-              <a:t>Notice a skill in action.</a:t>
-            </a:r>
-          </a:p>
-          <a:p>
-            <a:pPr>
-              <a:spcAft>
-                <a:spcPts val="1400"/>
-              </a:spcAft>
-              <a:defRPr sz="2100">
-                <a:solidFill>
-                  <a:srgbClr val="1B262C"/>
-                </a:solidFill>
-                <a:latin typeface="Aptos"/>
-              </a:defRPr>
-            </a:pPr>
-            <a:r>
-              <a:t>Capture a quote, observation, decision or moment.</a:t>
-            </a:r>
-          </a:p>
-          <a:p>
-            <a:pPr>
-              <a:spcAft>
-                <a:spcPts val="1400"/>
-              </a:spcAft>
-              <a:defRPr sz="2100">
-                <a:solidFill>
-                  <a:srgbClr val="1B262C"/>
-                </a:solidFill>
-                <a:latin typeface="Aptos"/>
-              </a:defRPr>
-            </a:pPr>
-            <a:r>
-              <a:t>Identify evidence that could belong in your portfolio.</a:t>
-            </a:r>
-          </a:p>
-        </p:txBody>
-      </p:sp>
-      <p:sp>
-        <p:nvSpPr>
-          <p:cNvPr id="5" name="Rectangle 4"/>
-          <p:cNvSpPr/>
-          <p:nvPr/>
-        </p:nvSpPr>
-        <p:spPr>
-          <a:xfrm>
-            <a:off x="0" y="6446520"/>
-            <a:ext cx="12191695" cy="411480"/>
-          </a:xfrm>
-          <a:prstGeom prst="rect">
-            <a:avLst/>
-          </a:prstGeom>
-          <a:solidFill>
-            <a:srgbClr val="062B3F"/>
-          </a:solidFill>
-          <a:ln>
-            <a:noFill/>
-          </a:ln>
-        </p:spPr>
-        <p:style>
-          <a:lnRef idx="1">
-            <a:schemeClr val="accent1"/>
-          </a:lnRef>
-          <a:fillRef idx="3">
-            <a:schemeClr val="accent1"/>
-          </a:fillRef>
-          <a:effectRef idx="2">
-            <a:schemeClr val="accent1"/>
-          </a:effectRef>
-          <a:fontRef idx="minor">
-            <a:schemeClr val="lt1"/>
-          </a:fontRef>
-        </p:style>
-        <p:txBody>
-          <a:bodyPr rtlCol="0" anchor="ctr"/>
-          <a:lstStyle/>
-          <a:p>
-            <a:pPr algn="ctr"/>
-          </a:p>
-        </p:txBody>
-      </p:sp>
-      <p:sp>
-        <p:nvSpPr>
-          <p:cNvPr id="6" name="TextBox 5"/>
-          <p:cNvSpPr txBox="1"/>
-          <p:nvPr/>
-        </p:nvSpPr>
-        <p:spPr>
-          <a:xfrm>
-            <a:off x="457200" y="6510528"/>
-            <a:ext cx="11247120" cy="182880"/>
-          </a:xfrm>
-          <a:prstGeom prst="rect">
-            <a:avLst/>
-          </a:prstGeom>
-          <a:noFill/>
-        </p:spPr>
-        <p:txBody>
-          <a:bodyPr wrap="none">
-            <a:spAutoFit/>
-          </a:bodyPr>
-          <a:lstStyle/>
-          <a:p>
-            <a:pPr algn="ctr">
-              <a:defRPr sz="900">
-                <a:solidFill>
-                  <a:srgbClr val="FFFFFF"/>
-                </a:solidFill>
-              </a:defRPr>
-            </a:pPr>
-            <a:r>
-              <a:t>BUILD6™ · WEEK 11 · © 2026 LINK Lake Norman, LLC · All Rights Reserved</a:t>
-            </a:r>
-          </a:p>
-        </p:txBody>
-      </p:sp>
-    </p:spTree>
-  </p:cSld>
-  <p:clrMapOvr>
-    <a:masterClrMapping/>
-  </p:clrMapOvr>
-</p:sld>
-</file>
-
-<file path=ppt/slides/slide9.xml><?xml version="1.0" encoding="utf-8"?>
-<p:sld xmlns:a="http://schemas.openxmlformats.org/drawingml/2006/main" xmlns:p="http://schemas.openxmlformats.org/presentationml/2006/main" xmlns:r="http://schemas.openxmlformats.org/officeDocument/2006/relationships">
-  <p:cSld>
-    <p:bg>
-      <p:bgPr>
-        <a:solidFill>
-          <a:srgbClr val="F5F9FA"/>
-        </a:solidFill>
-        <a:effectLst/>
-      </p:bgPr>
-    </p:bg>
-    <p:spTree>
-      <p:nvGrpSpPr>
-        <p:cNvPr id="1" name=""/>
-        <p:cNvGrpSpPr/>
-        <p:nvPr/>
-      </p:nvGrpSpPr>
-      <p:grpSpPr/>
-      <p:sp>
-        <p:nvSpPr>
-          <p:cNvPr id="2" name="Rectangle 1"/>
-          <p:cNvSpPr/>
-          <p:nvPr/>
-        </p:nvSpPr>
-        <p:spPr>
-          <a:xfrm>
-            <a:off x="0" y="0"/>
-            <a:ext cx="164592" cy="6858000"/>
-          </a:xfrm>
-          <a:prstGeom prst="rect">
-            <a:avLst/>
-          </a:prstGeom>
-          <a:solidFill>
-            <a:srgbClr val="00A6A6"/>
-          </a:solidFill>
-          <a:ln>
-            <a:noFill/>
-          </a:ln>
-        </p:spPr>
-        <p:style>
-          <a:lnRef idx="1">
-            <a:schemeClr val="accent1"/>
-          </a:lnRef>
-          <a:fillRef idx="3">
-            <a:schemeClr val="accent1"/>
-          </a:fillRef>
-          <a:effectRef idx="2">
-            <a:schemeClr val="accent1"/>
-          </a:effectRef>
-          <a:fontRef idx="minor">
-            <a:schemeClr val="lt1"/>
-          </a:fontRef>
-        </p:style>
-        <p:txBody>
-          <a:bodyPr rtlCol="0" anchor="ctr"/>
-          <a:lstStyle/>
-          <a:p>
-            <a:pPr algn="ctr"/>
-          </a:p>
-        </p:txBody>
-      </p:sp>
-      <p:sp>
-        <p:nvSpPr>
-          <p:cNvPr id="3" name="TextBox 2"/>
-          <p:cNvSpPr txBox="1"/>
-          <p:nvPr/>
-        </p:nvSpPr>
-        <p:spPr>
-          <a:xfrm>
-            <a:off x="594360" y="411480"/>
-            <a:ext cx="10972800" cy="640080"/>
-          </a:xfrm>
-          <a:prstGeom prst="rect">
-            <a:avLst/>
-          </a:prstGeom>
-          <a:noFill/>
-        </p:spPr>
-        <p:txBody>
-          <a:bodyPr wrap="none">
-            <a:spAutoFit/>
-          </a:bodyPr>
-          <a:lstStyle/>
-          <a:p>
-            <a:pPr>
-              <a:defRPr sz="2900" b="1">
-                <a:solidFill>
-                  <a:srgbClr val="062B3F"/>
-                </a:solidFill>
-                <a:latin typeface="Aptos Display"/>
-              </a:defRPr>
-            </a:pPr>
-            <a:r>
-              <a:t>After: Reflection</a:t>
-            </a:r>
-          </a:p>
-        </p:txBody>
-      </p:sp>
-      <p:sp>
-        <p:nvSpPr>
-          <p:cNvPr id="4" name="TextBox 3"/>
-          <p:cNvSpPr txBox="1"/>
-          <p:nvPr/>
-        </p:nvSpPr>
-        <p:spPr>
-          <a:xfrm>
-            <a:off x="822960" y="1463040"/>
-            <a:ext cx="10561320" cy="4480560"/>
-          </a:xfrm>
-          <a:prstGeom prst="rect">
-            <a:avLst/>
-          </a:prstGeom>
-          <a:noFill/>
-        </p:spPr>
-        <p:txBody>
-          <a:bodyPr wrap="square">
-            <a:spAutoFit/>
-          </a:bodyPr>
-          <a:lstStyle/>
-          <a:p>
-            <a:pPr>
-              <a:spcAft>
-                <a:spcPts val="1400"/>
-              </a:spcAft>
-              <a:defRPr sz="2100">
-                <a:solidFill>
-                  <a:srgbClr val="1B262C"/>
-                </a:solidFill>
-                <a:latin typeface="Aptos"/>
-              </a:defRPr>
-            </a:pPr>
-            <a:r>
-              <a:t>What story from today is worth preserving?</a:t>
-            </a:r>
-          </a:p>
-          <a:p>
-            <a:pPr>
-              <a:spcAft>
-                <a:spcPts val="1400"/>
-              </a:spcAft>
-              <a:defRPr sz="2100">
-                <a:solidFill>
-                  <a:srgbClr val="1B262C"/>
-                </a:solidFill>
-                <a:latin typeface="Aptos"/>
-              </a:defRPr>
-            </a:pPr>
-            <a:r>
-              <a:t>How would I explain what I learned to someone else?</a:t>
-            </a:r>
-          </a:p>
-          <a:p>
-            <a:pPr>
-              <a:spcAft>
-                <a:spcPts val="1400"/>
-              </a:spcAft>
-              <a:defRPr sz="2100">
-                <a:solidFill>
-                  <a:srgbClr val="1B262C"/>
-                </a:solidFill>
-                <a:latin typeface="Aptos"/>
-              </a:defRPr>
-            </a:pPr>
-            <a:r>
-              <a:t>What would make that explanation more compelling?</a:t>
-            </a:r>
-          </a:p>
-        </p:txBody>
-      </p:sp>
-      <p:sp>
-        <p:nvSpPr>
-          <p:cNvPr id="5" name="Rectangle 4"/>
-          <p:cNvSpPr/>
-          <p:nvPr/>
-        </p:nvSpPr>
-        <p:spPr>
-          <a:xfrm>
-            <a:off x="0" y="6446520"/>
-            <a:ext cx="12191695" cy="411480"/>
-          </a:xfrm>
-          <a:prstGeom prst="rect">
-            <a:avLst/>
-          </a:prstGeom>
-          <a:solidFill>
-            <a:srgbClr val="062B3F"/>
-          </a:solidFill>
-          <a:ln>
-            <a:noFill/>
-          </a:ln>
-        </p:spPr>
-        <p:style>
-          <a:lnRef idx="1">
-            <a:schemeClr val="accent1"/>
-          </a:lnRef>
-          <a:fillRef idx="3">
-            <a:schemeClr val="accent1"/>
-          </a:fillRef>
-          <a:effectRef idx="2">
-            <a:schemeClr val="accent1"/>
-          </a:effectRef>
-          <a:fontRef idx="minor">
-            <a:schemeClr val="lt1"/>
-          </a:fontRef>
-        </p:style>
-        <p:txBody>
-          <a:bodyPr rtlCol="0" anchor="ctr"/>
-          <a:lstStyle/>
-          <a:p>
-            <a:pPr algn="ctr"/>
-          </a:p>
-        </p:txBody>
-      </p:sp>
-      <p:sp>
-        <p:nvSpPr>
-          <p:cNvPr id="6" name="TextBox 5"/>
-          <p:cNvSpPr txBox="1"/>
-          <p:nvPr/>
-        </p:nvSpPr>
-        <p:spPr>
-          <a:xfrm>
-            <a:off x="457200" y="6510528"/>
-            <a:ext cx="11247120" cy="182880"/>
-          </a:xfrm>
-          <a:prstGeom prst="rect">
-            <a:avLst/>
-          </a:prstGeom>
-          <a:noFill/>
-        </p:spPr>
-        <p:txBody>
-          <a:bodyPr wrap="none">
-            <a:spAutoFit/>
-          </a:bodyPr>
-          <a:lstStyle/>
-          <a:p>
-            <a:pPr algn="ctr">
-              <a:defRPr sz="900">
-                <a:solidFill>
-                  <a:srgbClr val="FFFFFF"/>
-                </a:solidFill>
-              </a:defRPr>
-            </a:pPr>
-            <a:r>
-              <a:t>BUILD6™ · WEEK 11 · © 2026 LINK Lake Norman, LLC · All Rights Reserved</a:t>
+              <a:t>Capstone connection: Preserve one operations insight that changed how you understand work: what you observed, which roles were connected, and what could happen if one handoff failed.</a:t>
             </a:r>
           </a:p>
         </p:txBody>
